--- a/output/ppt/isolation_portfolio_deck.pptx
+++ b/output/ppt/isolation_portfolio_deck.pptx
@@ -3,7 +3,7 @@
 <Properties xmlns="http://schemas.openxmlformats.org/officeDocument/2006/extended-properties" xmlns:vt="http://schemas.openxmlformats.org/officeDocument/2006/docPropsVTypes">
   <Application>Codex PPTX Generator</Application>
   <PresentationFormat>Widescreen</PresentationFormat>
-  <Slides>14</Slides>
+  <Slides>16</Slides>
 </Properties>
 </file>
 
@@ -37,6 +37,8 @@
     <p:sldId id="267" r:id="rId13"/>
     <p:sldId id="268" r:id="rId14"/>
     <p:sldId id="269" r:id="rId15"/>
+    <p:sldId id="270" r:id="rId16"/>
+    <p:sldId id="271" r:id="rId17"/>
   </p:sldIdLst>
   <p:sldSz cx="12192000" cy="6858000" type="wide"/>
   <p:notesSz cx="6858000" cy="9144000"/>
@@ -91,7 +93,7 @@
     <p:bg>
       <p:bgPr>
         <a:solidFill>
-          <a:srgbClr val="0B1020"/>
+          <a:srgbClr val="F7FBFF"/>
         </a:solidFill>
         <a:effectLst/>
       </p:bgPr>
@@ -125,7 +127,7 @@
             <a:avLst/>
           </a:prstGeom>
           <a:solidFill>
-            <a:srgbClr val="0B1020">
+            <a:srgbClr val="F7FBFF">
               <a:alpha val="100000"/>
             </a:srgbClr>
           </a:solidFill>
@@ -226,12 +228,12 @@
               <a:rPr lang="ko-KR" sz="2700" dirty="0">
                 <a:b/>
                 <a:solidFill>
-                  <a:srgbClr val="FFFFFF"/>
-                </a:solidFill>
-                <a:latin typeface="Malgun Gothic"/>
-                <a:ea typeface="Malgun Gothic"/>
-              </a:rPr>
-              <a:t>Portfolio Case Study</a:t>
+                  <a:srgbClr val="0F3D66"/>
+                </a:solidFill>
+                <a:latin typeface="Malgun Gothic"/>
+                <a:ea typeface="Malgun Gothic"/>
+              </a:rPr>
+              <a:t>Interactive Survey Platform</a:t>
             </a:r>
           </a:p>
         </p:txBody>
@@ -244,8 +246,8 @@
         </p:nvSpPr>
         <p:spPr>
           <a:xfrm>
-            <a:off x="731520" y="1234440"/>
-            <a:ext cx="9875520" cy="1097280"/>
+            <a:off x="685800" y="1143000"/>
+            <a:ext cx="5120640" cy="1005840"/>
           </a:xfrm>
           <a:prstGeom prst="rect">
             <a:avLst/>
@@ -263,15 +265,15 @@
               <a:buNone/>
             </a:pPr>
             <a:r>
-              <a:rPr lang="ko-KR" sz="3000" dirty="0">
+              <a:rPr lang="ko-KR" sz="2500" dirty="0">
                 <a:b/>
                 <a:solidFill>
-                  <a:srgbClr val="FFFFFF"/>
-                </a:solidFill>
-                <a:latin typeface="Malgun Gothic"/>
-                <a:ea typeface="Malgun Gothic"/>
-              </a:rPr>
-              <a:t>설문 데이터 기반 인터랙티브 콘텐츠 플랫폼</a:t>
+                  <a:srgbClr val="0F3D66"/>
+                </a:solidFill>
+                <a:latin typeface="Malgun Gothic"/>
+                <a:ea typeface="Malgun Gothic"/>
+              </a:rPr>
+              <a:t>DB · Backend · RAG · 3D Interaction</a:t>
             </a:r>
           </a:p>
         </p:txBody>
@@ -284,8 +286,8 @@
         </p:nvSpPr>
         <p:spPr>
           <a:xfrm>
-            <a:off x="822960" y="2743200"/>
-            <a:ext cx="10332720" cy="2286000"/>
+            <a:off x="749808" y="2487168"/>
+            <a:ext cx="4389120" cy="731520"/>
           </a:xfrm>
           <a:prstGeom prst="rect">
             <a:avLst/>
@@ -296,55 +298,221 @@
           </a:ln>
         </p:spPr>
         <p:txBody>
-          <a:bodyPr wrap="square" lIns="45720" tIns="45720" rIns="45720" bIns="45720" anchor="top"/>
-          <a:lstStyle/>
-          <a:p>
-            <a:pPr marL="228600" indent="-171450" algn="l">
-              <a:buChar char="•"/>
-            </a:pPr>
-            <a:r>
-              <a:rPr lang="ko-KR" sz="1900" dirty="0">
-                <a:solidFill>
-                  <a:srgbClr val="EAF6FF"/>
-                </a:solidFill>
-                <a:latin typeface="Malgun Gothic"/>
-                <a:ea typeface="Malgun Gothic"/>
-              </a:rPr>
-              <a:t>역할: DB 연동, 백엔드 API, RAG 검열, 통계 데이터 가공, 인터랙션 시각화 구현</a:t>
-            </a:r>
-          </a:p>
-          <a:p>
-            <a:pPr marL="228600" indent="-171450" algn="l">
-              <a:buChar char="•"/>
-            </a:pPr>
-            <a:r>
-              <a:rPr lang="ko-KR" sz="1900" dirty="0">
-                <a:solidFill>
-                  <a:srgbClr val="EAF6FF"/>
-                </a:solidFill>
-                <a:latin typeface="Malgun Gothic"/>
-                <a:ea typeface="Malgun Gothic"/>
-              </a:rPr>
-              <a:t>기술: React, Express, MySQL, OpenAI API, Matter.js, Three.js/React Three 기반 인터랙션</a:t>
-            </a:r>
-          </a:p>
-          <a:p>
-            <a:pPr marL="228600" indent="-171450" algn="l">
-              <a:buChar char="•"/>
-            </a:pPr>
-            <a:r>
-              <a:rPr lang="ko-KR" sz="1900" dirty="0">
-                <a:solidFill>
-                  <a:srgbClr val="EAF6FF"/>
-                </a:solidFill>
-                <a:latin typeface="Malgun Gothic"/>
-                <a:ea typeface="Malgun Gothic"/>
-              </a:rPr>
-              <a:t>성과: 개인화 결과/전체 통계/검열 채팅을 하나의 사용자 흐름으로 연결</a:t>
-            </a:r>
-          </a:p>
-        </p:txBody>
-      </p:sp>
+          <a:bodyPr wrap="square" lIns="109728" tIns="73152" rIns="109728" bIns="73152" anchor="top"/>
+          <a:lstStyle/>
+          <a:p>
+            <a:pPr marL="0" indent="0" algn="l">
+              <a:buNone/>
+            </a:pPr>
+            <a:r>
+              <a:rPr lang="ko-KR" sz="1800" dirty="0">
+                <a:solidFill>
+                  <a:srgbClr val="17324D"/>
+                </a:solidFill>
+                <a:latin typeface="Malgun Gothic"/>
+                <a:ea typeface="Malgun Gothic"/>
+              </a:rPr>
+              <a:t>설문 데이터가 개인 결과, 전체 통계, 채팅 검열, 3D 체험으로 이어지는 풀스택 프로젝트</a:t>
+            </a:r>
+          </a:p>
+        </p:txBody>
+      </p:sp>
+      <p:sp>
+        <p:nvSpPr>
+          <p:cNvPr id="7" name="Shape 7"/>
+          <p:cNvSpPr txBox="1"/>
+          <p:nvPr/>
+        </p:nvSpPr>
+        <p:spPr>
+          <a:xfrm>
+            <a:off x="777240" y="3840480"/>
+            <a:ext cx="2834640" cy="640080"/>
+          </a:xfrm>
+          <a:prstGeom prst="roundRect">
+            <a:avLst/>
+          </a:prstGeom>
+          <a:solidFill>
+            <a:srgbClr val="DDF1FF">
+              <a:alpha val="100000"/>
+            </a:srgbClr>
+          </a:solidFill>
+          <a:ln w="12700">
+            <a:solidFill>
+              <a:srgbClr val="9BD6FF"/>
+            </a:solidFill>
+          </a:ln>
+        </p:spPr>
+        <p:txBody>
+          <a:bodyPr wrap="square" lIns="109728" tIns="73152" rIns="109728" bIns="73152" anchor="mid"/>
+          <a:lstStyle/>
+          <a:p>
+            <a:pPr marL="0" indent="0" algn="l">
+              <a:buNone/>
+            </a:pPr>
+            <a:r>
+              <a:rPr lang="ko-KR" sz="1600" dirty="0">
+                <a:b/>
+                <a:solidFill>
+                  <a:srgbClr val="0F3D66"/>
+                </a:solidFill>
+                <a:latin typeface="Malgun Gothic"/>
+                <a:ea typeface="Malgun Gothic"/>
+              </a:rPr>
+              <a:t>React + Express + MySQL</a:t>
+            </a:r>
+          </a:p>
+        </p:txBody>
+      </p:sp>
+      <p:sp>
+        <p:nvSpPr>
+          <p:cNvPr id="8" name="Shape 8"/>
+          <p:cNvSpPr txBox="1"/>
+          <p:nvPr/>
+        </p:nvSpPr>
+        <p:spPr>
+          <a:xfrm>
+            <a:off x="3794760" y="3840480"/>
+            <a:ext cx="2103120" cy="640080"/>
+          </a:xfrm>
+          <a:prstGeom prst="roundRect">
+            <a:avLst/>
+          </a:prstGeom>
+          <a:solidFill>
+            <a:srgbClr val="EAF7FF">
+              <a:alpha val="100000"/>
+            </a:srgbClr>
+          </a:solidFill>
+          <a:ln w="12700">
+            <a:solidFill>
+              <a:srgbClr val="9BD6FF"/>
+            </a:solidFill>
+          </a:ln>
+        </p:spPr>
+        <p:txBody>
+          <a:bodyPr wrap="square" lIns="109728" tIns="73152" rIns="109728" bIns="73152" anchor="mid"/>
+          <a:lstStyle/>
+          <a:p>
+            <a:pPr marL="0" indent="0" algn="l">
+              <a:buNone/>
+            </a:pPr>
+            <a:r>
+              <a:rPr lang="ko-KR" sz="1600" dirty="0">
+                <a:b/>
+                <a:solidFill>
+                  <a:srgbClr val="0F3D66"/>
+                </a:solidFill>
+                <a:latin typeface="Malgun Gothic"/>
+                <a:ea typeface="Malgun Gothic"/>
+              </a:rPr>
+              <a:t>OpenAI RAG</a:t>
+            </a:r>
+          </a:p>
+        </p:txBody>
+      </p:sp>
+      <p:sp>
+        <p:nvSpPr>
+          <p:cNvPr id="9" name="Shape 9"/>
+          <p:cNvSpPr txBox="1"/>
+          <p:nvPr/>
+        </p:nvSpPr>
+        <p:spPr>
+          <a:xfrm>
+            <a:off x="6080760" y="3840480"/>
+            <a:ext cx="2560320" cy="640080"/>
+          </a:xfrm>
+          <a:prstGeom prst="roundRect">
+            <a:avLst/>
+          </a:prstGeom>
+          <a:solidFill>
+            <a:srgbClr val="EEF9FF">
+              <a:alpha val="100000"/>
+            </a:srgbClr>
+          </a:solidFill>
+          <a:ln w="12700">
+            <a:solidFill>
+              <a:srgbClr val="9BD6FF"/>
+            </a:solidFill>
+          </a:ln>
+        </p:spPr>
+        <p:txBody>
+          <a:bodyPr wrap="square" lIns="109728" tIns="73152" rIns="109728" bIns="73152" anchor="mid"/>
+          <a:lstStyle/>
+          <a:p>
+            <a:pPr marL="0" indent="0" algn="l">
+              <a:buNone/>
+            </a:pPr>
+            <a:r>
+              <a:rPr lang="ko-KR" sz="1600" dirty="0">
+                <a:b/>
+                <a:solidFill>
+                  <a:srgbClr val="0F3D66"/>
+                </a:solidFill>
+                <a:latin typeface="Malgun Gothic"/>
+                <a:ea typeface="Malgun Gothic"/>
+              </a:rPr>
+              <a:t>Three.js / Matter.js</a:t>
+            </a:r>
+          </a:p>
+        </p:txBody>
+      </p:sp>
+      <p:pic>
+        <p:nvPicPr>
+          <p:cNvPr id="10" name="Picture 10"/>
+          <p:cNvPicPr>
+            <a:picLocks noChangeAspect="1"/>
+          </p:cNvPicPr>
+          <p:nvPr/>
+        </p:nvPicPr>
+        <p:blipFill>
+          <a:blip r:embed="rId2"/>
+          <a:stretch>
+            <a:fillRect/>
+          </a:stretch>
+        </p:blipFill>
+        <p:spPr>
+          <a:xfrm>
+            <a:off x="8001000" y="1051560"/>
+            <a:ext cx="2606040" cy="5623560"/>
+          </a:xfrm>
+          <a:prstGeom prst="rect">
+            <a:avLst/>
+          </a:prstGeom>
+          <a:ln w="12700">
+            <a:solidFill>
+              <a:srgbClr val="C9E8FF"/>
+            </a:solidFill>
+          </a:ln>
+        </p:spPr>
+      </p:pic>
+      <p:pic>
+        <p:nvPicPr>
+          <p:cNvPr id="11" name="Picture 11"/>
+          <p:cNvPicPr>
+            <a:picLocks noChangeAspect="1"/>
+          </p:cNvPicPr>
+          <p:nvPr/>
+        </p:nvPicPr>
+        <p:blipFill>
+          <a:blip r:embed="rId3"/>
+          <a:stretch>
+            <a:fillRect/>
+          </a:stretch>
+        </p:blipFill>
+        <p:spPr>
+          <a:xfrm>
+            <a:off x="9464040" y="1417320"/>
+            <a:ext cx="2194560" cy="4754880"/>
+          </a:xfrm>
+          <a:prstGeom prst="rect">
+            <a:avLst/>
+          </a:prstGeom>
+          <a:ln w="12700">
+            <a:solidFill>
+              <a:srgbClr val="C9E8FF"/>
+            </a:solidFill>
+          </a:ln>
+        </p:spPr>
+      </p:pic>
     </p:spTree>
   </p:cSld>
   <p:clrMapOvr>
@@ -359,7 +527,7 @@
     <p:bg>
       <p:bgPr>
         <a:solidFill>
-          <a:srgbClr val="101820"/>
+          <a:srgbClr val="F7FBFF"/>
         </a:solidFill>
         <a:effectLst/>
       </p:bgPr>
@@ -393,7 +561,7 @@
             <a:avLst/>
           </a:prstGeom>
           <a:solidFill>
-            <a:srgbClr val="101820">
+            <a:srgbClr val="F7FBFF">
               <a:alpha val="100000"/>
             </a:srgbClr>
           </a:solidFill>
@@ -494,12 +662,12 @@
               <a:rPr lang="ko-KR" sz="2700" dirty="0">
                 <a:b/>
                 <a:solidFill>
-                  <a:srgbClr val="FFFFFF"/>
-                </a:solidFill>
-                <a:latin typeface="Malgun Gothic"/>
-                <a:ea typeface="Malgun Gothic"/>
-              </a:rPr>
-              <a:t>데이터 시각화</a:t>
+                  <a:srgbClr val="0F3D66"/>
+                </a:solidFill>
+                <a:latin typeface="Malgun Gothic"/>
+                <a:ea typeface="Malgun Gothic"/>
+              </a:rPr>
+              <a:t>Step2 3D Scene</a:t>
             </a:r>
           </a:p>
         </p:txBody>
@@ -512,204 +680,125 @@
         </p:nvSpPr>
         <p:spPr>
           <a:xfrm>
-            <a:off x="822960" y="1143000"/>
-            <a:ext cx="4754880" cy="4206240"/>
-          </a:xfrm>
-          <a:prstGeom prst="roundRect">
-            <a:avLst/>
-          </a:prstGeom>
-          <a:solidFill>
-            <a:srgbClr val="1D2E44">
-              <a:alpha val="100000"/>
-            </a:srgbClr>
-          </a:solidFill>
-          <a:ln>
-            <a:noFill/>
-          </a:ln>
-        </p:spPr>
-        <p:txBody>
-          <a:bodyPr wrap="square" lIns="109728" tIns="73152" rIns="109728" bIns="73152" anchor="top"/>
-          <a:lstStyle/>
-          <a:p>
-            <a:pPr marL="0" indent="0" algn="l">
-              <a:buNone/>
-            </a:pPr>
-            <a:r>
-              <a:rPr lang="ko-KR" sz="2000" dirty="0">
-                <a:solidFill>
-                  <a:srgbClr val="FFFFFF"/>
-                </a:solidFill>
-                <a:latin typeface="Malgun Gothic"/>
-                <a:ea typeface="Malgun Gothic"/>
-              </a:rPr>
-              <a:t>참여자 입자 시각화</a:t>
-            </a:r>
-          </a:p>
-          <a:p>
-            <a:pPr marL="0" indent="0" algn="l">
-              <a:buNone/>
-            </a:pPr>
-            <a:r>
-              <a:rPr lang="ko-KR" sz="2000" dirty="0">
-                <a:solidFill>
-                  <a:srgbClr val="FFFFFF"/>
-                </a:solidFill>
-                <a:latin typeface="Malgun Gothic"/>
-                <a:ea typeface="Malgun Gothic"/>
-              </a:rPr>
-              <a:t>참여자 1명 = 입자 1개</a:t>
-            </a:r>
-          </a:p>
-          <a:p>
-            <a:pPr marL="0" indent="0" algn="l">
-              <a:buNone/>
-            </a:pPr>
-            <a:r>
-              <a:rPr lang="ko-KR" sz="2000" dirty="0">
-                <a:solidFill>
-                  <a:srgbClr val="FFFFFF"/>
-                </a:solidFill>
-                <a:latin typeface="Malgun Gothic"/>
-                <a:ea typeface="Malgun Gothic"/>
-              </a:rPr>
-              <a:t>Matter.js 물리 엔진</a:t>
-            </a:r>
-          </a:p>
-          <a:p>
-            <a:pPr marL="0" indent="0" algn="l">
-              <a:buNone/>
-            </a:pPr>
-            <a:r>
-              <a:rPr lang="ko-KR" sz="2000" dirty="0">
-                <a:solidFill>
-                  <a:srgbClr val="FFFFFF"/>
-                </a:solidFill>
-                <a:latin typeface="Malgun Gothic"/>
-                <a:ea typeface="Malgun Gothic"/>
-              </a:rPr>
-              <a:t>위에서 떨어져 쌓이는 움직임</a:t>
-            </a:r>
-          </a:p>
-          <a:p>
-            <a:pPr marL="0" indent="0" algn="l">
-              <a:buNone/>
-            </a:pPr>
-            <a:r>
-              <a:rPr lang="ko-KR" sz="2000" dirty="0">
-                <a:solidFill>
-                  <a:srgbClr val="FFFFFF"/>
-                </a:solidFill>
-                <a:latin typeface="Malgun Gothic"/>
-                <a:ea typeface="Malgun Gothic"/>
-              </a:rPr>
-              <a:t>전체 참여 규모 직관화</a:t>
-            </a:r>
-          </a:p>
-        </p:txBody>
-      </p:sp>
-      <p:sp>
-        <p:nvSpPr>
-          <p:cNvPr id="6" name="Shape 6"/>
-          <p:cNvSpPr txBox="1"/>
-          <p:nvPr/>
-        </p:nvSpPr>
-        <p:spPr>
-          <a:xfrm>
-            <a:off x="6492240" y="1143000"/>
-            <a:ext cx="4754880" cy="4206240"/>
-          </a:xfrm>
-          <a:prstGeom prst="roundRect">
-            <a:avLst/>
-          </a:prstGeom>
-          <a:solidFill>
-            <a:srgbClr val="60D394">
-              <a:alpha val="100000"/>
-            </a:srgbClr>
-          </a:solidFill>
-          <a:ln>
-            <a:noFill/>
-          </a:ln>
-        </p:spPr>
-        <p:txBody>
-          <a:bodyPr wrap="square" lIns="109728" tIns="73152" rIns="109728" bIns="73152" anchor="top"/>
-          <a:lstStyle/>
-          <a:p>
-            <a:pPr marL="0" indent="0" algn="l">
-              <a:buNone/>
-            </a:pPr>
-            <a:r>
-              <a:rPr lang="ko-KR" sz="2000" dirty="0">
-                <a:solidFill>
-                  <a:srgbClr val="101820"/>
-                </a:solidFill>
-                <a:latin typeface="Malgun Gothic"/>
-                <a:ea typeface="Malgun Gothic"/>
-              </a:rPr>
-              <a:t>문항별 원그래프</a:t>
-            </a:r>
-          </a:p>
-          <a:p>
-            <a:pPr marL="0" indent="0" algn="l">
-              <a:buNone/>
-            </a:pPr>
-            <a:r>
-              <a:rPr lang="ko-KR" sz="2000" dirty="0">
-                <a:solidFill>
-                  <a:srgbClr val="101820"/>
-                </a:solidFill>
-                <a:latin typeface="Malgun Gothic"/>
-                <a:ea typeface="Malgun Gothic"/>
-              </a:rPr>
-              <a:t>choice: option별 비율</a:t>
-            </a:r>
-          </a:p>
-          <a:p>
-            <a:pPr marL="0" indent="0" algn="l">
-              <a:buNone/>
-            </a:pPr>
-            <a:r>
-              <a:rPr lang="ko-KR" sz="2000" dirty="0">
-                <a:solidFill>
-                  <a:srgbClr val="101820"/>
-                </a:solidFill>
-                <a:latin typeface="Malgun Gothic"/>
-                <a:ea typeface="Malgun Gothic"/>
-              </a:rPr>
-              <a:t>input: 긍정/부정/중립 비율</a:t>
-            </a:r>
-          </a:p>
-          <a:p>
-            <a:pPr marL="0" indent="0" algn="l">
-              <a:buNone/>
-            </a:pPr>
-            <a:r>
-              <a:rPr lang="ko-KR" sz="2000" dirty="0">
-                <a:solidFill>
-                  <a:srgbClr val="101820"/>
-                </a:solidFill>
-                <a:latin typeface="Malgun Gothic"/>
-                <a:ea typeface="Malgun Gothic"/>
-              </a:rPr>
-              <a:t>썸네일 기반 문항 선택</a:t>
-            </a:r>
-          </a:p>
-          <a:p>
-            <a:pPr marL="0" indent="0" algn="l">
-              <a:buNone/>
-            </a:pPr>
-            <a:r>
-              <a:rPr lang="ko-KR" sz="2000" dirty="0">
-                <a:solidFill>
-                  <a:srgbClr val="101820"/>
-                </a:solidFill>
-                <a:latin typeface="Malgun Gothic"/>
-                <a:ea typeface="Malgun Gothic"/>
-              </a:rPr>
-              <a:t>상세 수치와 percentage 표시</a:t>
-            </a:r>
-          </a:p>
-        </p:txBody>
-      </p:sp>
+            <a:off x="685800" y="1005840"/>
+            <a:ext cx="4023360" cy="2743200"/>
+          </a:xfrm>
+          <a:prstGeom prst="rect">
+            <a:avLst/>
+          </a:prstGeom>
+          <a:noFill/>
+          <a:ln>
+            <a:noFill/>
+          </a:ln>
+        </p:spPr>
+        <p:txBody>
+          <a:bodyPr wrap="square" lIns="45720" tIns="45720" rIns="45720" bIns="45720" anchor="top"/>
+          <a:lstStyle/>
+          <a:p>
+            <a:pPr marL="228600" indent="-171450" algn="l">
+              <a:buChar char="•"/>
+            </a:pPr>
+            <a:r>
+              <a:rPr lang="ko-KR" sz="1800" dirty="0">
+                <a:solidFill>
+                  <a:srgbClr val="17324D"/>
+                </a:solidFill>
+                <a:latin typeface="Malgun Gothic"/>
+                <a:ea typeface="Malgun Gothic"/>
+              </a:rPr>
+              <a:t>React Three Fiber Canvas</a:t>
+            </a:r>
+          </a:p>
+          <a:p>
+            <a:pPr marL="228600" indent="-171450" algn="l">
+              <a:buChar char="•"/>
+            </a:pPr>
+            <a:r>
+              <a:rPr lang="ko-KR" sz="1800" dirty="0">
+                <a:solidFill>
+                  <a:srgbClr val="17324D"/>
+                </a:solidFill>
+                <a:latin typeface="Malgun Gothic"/>
+                <a:ea typeface="Malgun Gothic"/>
+              </a:rPr>
+              <a:t>Drei ScrollControls / Environment</a:t>
+            </a:r>
+          </a:p>
+          <a:p>
+            <a:pPr marL="228600" indent="-171450" algn="l">
+              <a:buChar char="•"/>
+            </a:pPr>
+            <a:r>
+              <a:rPr lang="ko-KR" sz="1800" dirty="0">
+                <a:solidFill>
+                  <a:srgbClr val="17324D"/>
+                </a:solidFill>
+                <a:latin typeface="Malgun Gothic"/>
+                <a:ea typeface="Malgun Gothic"/>
+              </a:rPr>
+              <a:t>스크롤과 포인터 입력에 반응하는 심해 입자</a:t>
+            </a:r>
+          </a:p>
+        </p:txBody>
+      </p:sp>
+      <p:pic>
+        <p:nvPicPr>
+          <p:cNvPr id="6" name="Picture 6"/>
+          <p:cNvPicPr>
+            <a:picLocks noChangeAspect="1"/>
+          </p:cNvPicPr>
+          <p:nvPr/>
+        </p:nvPicPr>
+        <p:blipFill>
+          <a:blip r:embed="rId2"/>
+          <a:stretch>
+            <a:fillRect/>
+          </a:stretch>
+        </p:blipFill>
+        <p:spPr>
+          <a:xfrm>
+            <a:off x="4983480" y="868680"/>
+            <a:ext cx="2560320" cy="5532120"/>
+          </a:xfrm>
+          <a:prstGeom prst="rect">
+            <a:avLst/>
+          </a:prstGeom>
+          <a:ln w="12700">
+            <a:solidFill>
+              <a:srgbClr val="C7E6FF"/>
+            </a:solidFill>
+          </a:ln>
+        </p:spPr>
+      </p:pic>
+      <p:pic>
+        <p:nvPicPr>
+          <p:cNvPr id="7" name="Picture 7"/>
+          <p:cNvPicPr>
+            <a:picLocks noChangeAspect="1"/>
+          </p:cNvPicPr>
+          <p:nvPr/>
+        </p:nvPicPr>
+        <p:blipFill>
+          <a:blip r:embed="rId3"/>
+          <a:stretch>
+            <a:fillRect/>
+          </a:stretch>
+        </p:blipFill>
+        <p:spPr>
+          <a:xfrm>
+            <a:off x="7955280" y="868680"/>
+            <a:ext cx="2560320" cy="5532120"/>
+          </a:xfrm>
+          <a:prstGeom prst="rect">
+            <a:avLst/>
+          </a:prstGeom>
+          <a:ln w="12700">
+            <a:solidFill>
+              <a:srgbClr val="C7E6FF"/>
+            </a:solidFill>
+          </a:ln>
+        </p:spPr>
+      </p:pic>
     </p:spTree>
   </p:cSld>
   <p:clrMapOvr>
@@ -724,7 +813,7 @@
     <p:bg>
       <p:bgPr>
         <a:solidFill>
-          <a:srgbClr val="13263A"/>
+          <a:srgbClr val="F7FBFF"/>
         </a:solidFill>
         <a:effectLst/>
       </p:bgPr>
@@ -758,7 +847,7 @@
             <a:avLst/>
           </a:prstGeom>
           <a:solidFill>
-            <a:srgbClr val="13263A">
+            <a:srgbClr val="F7FBFF">
               <a:alpha val="100000"/>
             </a:srgbClr>
           </a:solidFill>
@@ -801,7 +890,7 @@
             <a:avLst/>
           </a:prstGeom>
           <a:solidFill>
-            <a:srgbClr val="EF476F">
+            <a:srgbClr val="37B7FF">
               <a:alpha val="100000"/>
             </a:srgbClr>
           </a:solidFill>
@@ -859,12 +948,12 @@
               <a:rPr lang="ko-KR" sz="2700" dirty="0">
                 <a:b/>
                 <a:solidFill>
-                  <a:srgbClr val="FFFFFF"/>
-                </a:solidFill>
-                <a:latin typeface="Malgun Gothic"/>
-                <a:ea typeface="Malgun Gothic"/>
-              </a:rPr>
-              <a:t>트러블슈팅</a:t>
+                  <a:srgbClr val="0F3D66"/>
+                </a:solidFill>
+                <a:latin typeface="Malgun Gothic"/>
+                <a:ea typeface="Malgun Gothic"/>
+              </a:rPr>
+              <a:t>3D Animation Code</a:t>
             </a:r>
           </a:p>
         </p:txBody>
@@ -877,8 +966,8 @@
         </p:nvSpPr>
         <p:spPr>
           <a:xfrm>
-            <a:off x="777240" y="1051560"/>
-            <a:ext cx="10332720" cy="4754880"/>
+            <a:off x="685800" y="1005840"/>
+            <a:ext cx="3108960" cy="3108960"/>
           </a:xfrm>
           <a:prstGeom prst="rect">
             <a:avLst/>
@@ -896,14 +985,14 @@
               <a:buChar char="•"/>
             </a:pPr>
             <a:r>
-              <a:rPr lang="ko-KR" sz="1800" dirty="0">
-                <a:solidFill>
-                  <a:srgbClr val="EAF6FF"/>
-                </a:solidFill>
-                <a:latin typeface="Malgun Gothic"/>
-                <a:ea typeface="Malgun Gothic"/>
-              </a:rPr>
-              <a:t>API 실패와 fallback 데이터 혼용 문제: 성공 응답일 때만 DB 데이터 사용</a:t>
+              <a:rPr lang="ko-KR" sz="1700" dirty="0">
+                <a:solidFill>
+                  <a:srgbClr val="17324D"/>
+                </a:solidFill>
+                <a:latin typeface="Malgun Gothic"/>
+                <a:ea typeface="Malgun Gothic"/>
+              </a:rPr>
+              <a:t>useFrame으로 매 프레임 갱신</a:t>
             </a:r>
           </a:p>
           <a:p>
@@ -911,14 +1000,14 @@
               <a:buChar char="•"/>
             </a:pPr>
             <a:r>
-              <a:rPr lang="ko-KR" sz="1800" dirty="0">
-                <a:solidFill>
-                  <a:srgbClr val="EAF6FF"/>
-                </a:solidFill>
-                <a:latin typeface="Malgun Gothic"/>
-                <a:ea typeface="Malgun Gothic"/>
-              </a:rPr>
-              <a:t>SCENE_0 통계 노출 문제: 개인정보 입력 장면 제외</a:t>
+              <a:rPr lang="ko-KR" sz="1700" dirty="0">
+                <a:solidFill>
+                  <a:srgbClr val="17324D"/>
+                </a:solidFill>
+                <a:latin typeface="Malgun Gothic"/>
+                <a:ea typeface="Malgun Gothic"/>
+              </a:rPr>
+              <a:t>instancedMesh로 다수 구체 최적화</a:t>
             </a:r>
           </a:p>
           <a:p>
@@ -926,48 +1015,105 @@
               <a:buChar char="•"/>
             </a:pPr>
             <a:r>
-              <a:rPr lang="ko-KR" sz="1800" dirty="0">
-                <a:solidFill>
-                  <a:srgbClr val="EAF6FF"/>
-                </a:solidFill>
-                <a:latin typeface="Malgun Gothic"/>
-                <a:ea typeface="Malgun Gothic"/>
-              </a:rPr>
-              <a:t>주관식 통계 분산 문제: answer_text_feeling 도입</a:t>
-            </a:r>
-          </a:p>
-          <a:p>
-            <a:pPr marL="228600" indent="-171450" algn="l">
-              <a:buChar char="•"/>
-            </a:pPr>
-            <a:r>
-              <a:rPr lang="ko-KR" sz="1800" dirty="0">
-                <a:solidFill>
-                  <a:srgbClr val="EAF6FF"/>
-                </a:solidFill>
-                <a:latin typeface="Malgun Gothic"/>
-                <a:ea typeface="Malgun Gothic"/>
-              </a:rPr>
-              <a:t>LLM 검열 중단 문제: PENDING 상태와 재처리 로직 추가</a:t>
-            </a:r>
-          </a:p>
-          <a:p>
-            <a:pPr marL="228600" indent="-171450" algn="l">
-              <a:buChar char="•"/>
-            </a:pPr>
-            <a:r>
-              <a:rPr lang="ko-KR" sz="1800" dirty="0">
-                <a:solidFill>
-                  <a:srgbClr val="EAF6FF"/>
-                </a:solidFill>
-                <a:latin typeface="Malgun Gothic"/>
-                <a:ea typeface="Malgun Gothic"/>
-              </a:rPr>
-              <a:t>오디오 자동재생 문제: 클릭 이벤트 체인에 연결</a:t>
-            </a:r>
-          </a:p>
-        </p:txBody>
-      </p:sp>
+              <a:rPr lang="ko-KR" sz="1700" dirty="0">
+                <a:solidFill>
+                  <a:srgbClr val="17324D"/>
+                </a:solidFill>
+                <a:latin typeface="Malgun Gothic"/>
+                <a:ea typeface="Malgun Gothic"/>
+              </a:rPr>
+              <a:t>Canvas 씬에서 카메라/조명/환경 구성</a:t>
+            </a:r>
+          </a:p>
+        </p:txBody>
+      </p:sp>
+      <p:pic>
+        <p:nvPicPr>
+          <p:cNvPr id="6" name="Picture 6"/>
+          <p:cNvPicPr>
+            <a:picLocks noChangeAspect="1"/>
+          </p:cNvPicPr>
+          <p:nvPr/>
+        </p:nvPicPr>
+        <p:blipFill>
+          <a:blip r:embed="rId2"/>
+          <a:stretch>
+            <a:fillRect/>
+          </a:stretch>
+        </p:blipFill>
+        <p:spPr>
+          <a:xfrm>
+            <a:off x="3931920" y="868680"/>
+            <a:ext cx="3657600" cy="5394960"/>
+          </a:xfrm>
+          <a:prstGeom prst="rect">
+            <a:avLst/>
+          </a:prstGeom>
+          <a:ln w="12700">
+            <a:solidFill>
+              <a:srgbClr val="C7E6FF"/>
+            </a:solidFill>
+          </a:ln>
+        </p:spPr>
+      </p:pic>
+      <p:pic>
+        <p:nvPicPr>
+          <p:cNvPr id="7" name="Picture 7"/>
+          <p:cNvPicPr>
+            <a:picLocks noChangeAspect="1"/>
+          </p:cNvPicPr>
+          <p:nvPr/>
+        </p:nvPicPr>
+        <p:blipFill>
+          <a:blip r:embed="rId3"/>
+          <a:stretch>
+            <a:fillRect/>
+          </a:stretch>
+        </p:blipFill>
+        <p:spPr>
+          <a:xfrm>
+            <a:off x="7818120" y="868680"/>
+            <a:ext cx="3566160" cy="2743200"/>
+          </a:xfrm>
+          <a:prstGeom prst="rect">
+            <a:avLst/>
+          </a:prstGeom>
+          <a:ln w="12700">
+            <a:solidFill>
+              <a:srgbClr val="C7E6FF"/>
+            </a:solidFill>
+          </a:ln>
+        </p:spPr>
+      </p:pic>
+      <p:pic>
+        <p:nvPicPr>
+          <p:cNvPr id="8" name="Picture 8"/>
+          <p:cNvPicPr>
+            <a:picLocks noChangeAspect="1"/>
+          </p:cNvPicPr>
+          <p:nvPr/>
+        </p:nvPicPr>
+        <p:blipFill>
+          <a:blip r:embed="rId4"/>
+          <a:stretch>
+            <a:fillRect/>
+          </a:stretch>
+        </p:blipFill>
+        <p:spPr>
+          <a:xfrm>
+            <a:off x="7818120" y="3794760"/>
+            <a:ext cx="3566160" cy="2468880"/>
+          </a:xfrm>
+          <a:prstGeom prst="rect">
+            <a:avLst/>
+          </a:prstGeom>
+          <a:ln w="12700">
+            <a:solidFill>
+              <a:srgbClr val="C7E6FF"/>
+            </a:solidFill>
+          </a:ln>
+        </p:spPr>
+      </p:pic>
     </p:spTree>
   </p:cSld>
   <p:clrMapOvr>
@@ -982,7 +1128,7 @@
     <p:bg>
       <p:bgPr>
         <a:solidFill>
-          <a:srgbClr val="101820"/>
+          <a:srgbClr val="F7FBFF"/>
         </a:solidFill>
         <a:effectLst/>
       </p:bgPr>
@@ -1016,7 +1162,7 @@
             <a:avLst/>
           </a:prstGeom>
           <a:solidFill>
-            <a:srgbClr val="101820">
+            <a:srgbClr val="F7FBFF">
               <a:alpha val="100000"/>
             </a:srgbClr>
           </a:solidFill>
@@ -1059,7 +1205,7 @@
             <a:avLst/>
           </a:prstGeom>
           <a:solidFill>
-            <a:srgbClr val="FFD166">
+            <a:srgbClr val="37B7FF">
               <a:alpha val="100000"/>
             </a:srgbClr>
           </a:solidFill>
@@ -1117,12 +1263,12 @@
               <a:rPr lang="ko-KR" sz="2700" dirty="0">
                 <a:b/>
                 <a:solidFill>
-                  <a:srgbClr val="FFFFFF"/>
-                </a:solidFill>
-                <a:latin typeface="Malgun Gothic"/>
-                <a:ea typeface="Malgun Gothic"/>
-              </a:rPr>
-              <a:t>코드 좌표</a:t>
+                  <a:srgbClr val="0F3D66"/>
+                </a:solidFill>
+                <a:latin typeface="Malgun Gothic"/>
+                <a:ea typeface="Malgun Gothic"/>
+              </a:rPr>
+              <a:t>Step3 Statistics UI</a:t>
             </a:r>
           </a:p>
         </p:txBody>
@@ -1135,8 +1281,8 @@
         </p:nvSpPr>
         <p:spPr>
           <a:xfrm>
-            <a:off x="685800" y="960120"/>
-            <a:ext cx="5394960" cy="4846320"/>
+            <a:off x="685800" y="1005840"/>
+            <a:ext cx="3474720" cy="2834640"/>
           </a:xfrm>
           <a:prstGeom prst="rect">
             <a:avLst/>
@@ -1154,14 +1300,14 @@
               <a:buChar char="•"/>
             </a:pPr>
             <a:r>
-              <a:rPr lang="ko-KR" sz="1800" dirty="0">
-                <a:solidFill>
-                  <a:srgbClr val="EAF6FF"/>
-                </a:solidFill>
-                <a:latin typeface="Malgun Gothic"/>
-                <a:ea typeface="Malgun Gothic"/>
-              </a:rPr>
-              <a:t>server/config/db.js</a:t>
+              <a:rPr lang="ko-KR" sz="1700" dirty="0">
+                <a:solidFill>
+                  <a:srgbClr val="17324D"/>
+                </a:solidFill>
+                <a:latin typeface="Malgun Gothic"/>
+                <a:ea typeface="Malgun Gothic"/>
+              </a:rPr>
+              <a:t>참여자 1명 = 입자 1개</a:t>
             </a:r>
           </a:p>
           <a:p>
@@ -1169,14 +1315,14 @@
               <a:buChar char="•"/>
             </a:pPr>
             <a:r>
-              <a:rPr lang="ko-KR" sz="1800" dirty="0">
-                <a:solidFill>
-                  <a:srgbClr val="EAF6FF"/>
-                </a:solidFill>
-                <a:latin typeface="Malgun Gothic"/>
-                <a:ea typeface="Malgun Gothic"/>
-              </a:rPr>
-              <a:t>server/repositories/surveyResultRepository.js</a:t>
+              <a:rPr lang="ko-KR" sz="1700" dirty="0">
+                <a:solidFill>
+                  <a:srgbClr val="17324D"/>
+                </a:solidFill>
+                <a:latin typeface="Malgun Gothic"/>
+                <a:ea typeface="Malgun Gothic"/>
+              </a:rPr>
+              <a:t>Matter.js 물리 엔진으로 낙하/누적 표현</a:t>
             </a:r>
           </a:p>
           <a:p>
@@ -1184,147 +1330,105 @@
               <a:buChar char="•"/>
             </a:pPr>
             <a:r>
-              <a:rPr lang="ko-KR" sz="1800" dirty="0">
-                <a:solidFill>
-                  <a:srgbClr val="EAF6FF"/>
-                </a:solidFill>
-                <a:latin typeface="Malgun Gothic"/>
-                <a:ea typeface="Malgun Gothic"/>
-              </a:rPr>
-              <a:t>server/services/surveyResultService.js</a:t>
-            </a:r>
-          </a:p>
-          <a:p>
-            <a:pPr marL="228600" indent="-171450" algn="l">
-              <a:buChar char="•"/>
-            </a:pPr>
-            <a:r>
-              <a:rPr lang="ko-KR" sz="1800" dirty="0">
-                <a:solidFill>
-                  <a:srgbClr val="EAF6FF"/>
-                </a:solidFill>
-                <a:latin typeface="Malgun Gothic"/>
-                <a:ea typeface="Malgun Gothic"/>
-              </a:rPr>
-              <a:t>server/repositories/statisticsRepository.js</a:t>
-            </a:r>
-          </a:p>
-          <a:p>
-            <a:pPr marL="228600" indent="-171450" algn="l">
-              <a:buChar char="•"/>
-            </a:pPr>
-            <a:r>
-              <a:rPr lang="ko-KR" sz="1800" dirty="0">
-                <a:solidFill>
-                  <a:srgbClr val="EAF6FF"/>
-                </a:solidFill>
-                <a:latin typeface="Malgun Gothic"/>
-                <a:ea typeface="Malgun Gothic"/>
-              </a:rPr>
-              <a:t>server/services/statisticsService.js</a:t>
-            </a:r>
-          </a:p>
-        </p:txBody>
-      </p:sp>
-      <p:sp>
-        <p:nvSpPr>
-          <p:cNvPr id="6" name="Shape 6"/>
-          <p:cNvSpPr txBox="1"/>
-          <p:nvPr/>
-        </p:nvSpPr>
-        <p:spPr>
-          <a:xfrm>
-            <a:off x="6400800" y="960120"/>
-            <a:ext cx="5212080" cy="4846320"/>
-          </a:xfrm>
-          <a:prstGeom prst="rect">
-            <a:avLst/>
-          </a:prstGeom>
-          <a:noFill/>
-          <a:ln>
-            <a:noFill/>
-          </a:ln>
-        </p:spPr>
-        <p:txBody>
-          <a:bodyPr wrap="square" lIns="45720" tIns="45720" rIns="45720" bIns="45720" anchor="top"/>
-          <a:lstStyle/>
-          <a:p>
-            <a:pPr marL="228600" indent="-171450" algn="l">
-              <a:buChar char="•"/>
-            </a:pPr>
-            <a:r>
-              <a:rPr lang="ko-KR" sz="1800" dirty="0">
-                <a:solidFill>
-                  <a:srgbClr val="EAF6FF"/>
-                </a:solidFill>
-                <a:latin typeface="Malgun Gothic"/>
-                <a:ea typeface="Malgun Gothic"/>
-              </a:rPr>
-              <a:t>server/services/warmMessageService.js</a:t>
-            </a:r>
-          </a:p>
-          <a:p>
-            <a:pPr marL="228600" indent="-171450" algn="l">
-              <a:buChar char="•"/>
-            </a:pPr>
-            <a:r>
-              <a:rPr lang="ko-KR" sz="1800" dirty="0">
-                <a:solidFill>
-                  <a:srgbClr val="EAF6FF"/>
-                </a:solidFill>
-                <a:latin typeface="Malgun Gothic"/>
-                <a:ea typeface="Malgun Gothic"/>
-              </a:rPr>
-              <a:t>server/prompts/messageRag.js</a:t>
-            </a:r>
-          </a:p>
-          <a:p>
-            <a:pPr marL="228600" indent="-171450" algn="l">
-              <a:buChar char="•"/>
-            </a:pPr>
-            <a:r>
-              <a:rPr lang="ko-KR" sz="1800" dirty="0">
-                <a:solidFill>
-                  <a:srgbClr val="EAF6FF"/>
-                </a:solidFill>
-                <a:latin typeface="Malgun Gothic"/>
-                <a:ea typeface="Malgun Gothic"/>
-              </a:rPr>
-              <a:t>server/utils/fastscanner.js</a:t>
-            </a:r>
-          </a:p>
-          <a:p>
-            <a:pPr marL="228600" indent="-171450" algn="l">
-              <a:buChar char="•"/>
-            </a:pPr>
-            <a:r>
-              <a:rPr lang="ko-KR" sz="1800" dirty="0">
-                <a:solidFill>
-                  <a:srgbClr val="EAF6FF"/>
-                </a:solidFill>
-                <a:latin typeface="Malgun Gothic"/>
-                <a:ea typeface="Malgun Gothic"/>
-              </a:rPr>
-              <a:t>server/controllers/warmMessageController.js</a:t>
-            </a:r>
-          </a:p>
-          <a:p>
-            <a:pPr marL="228600" indent="-171450" algn="l">
-              <a:buChar char="•"/>
-            </a:pPr>
-            <a:r>
-              <a:rPr lang="ko-KR" sz="1800" dirty="0">
-                <a:solidFill>
-                  <a:srgbClr val="EAF6FF"/>
-                </a:solidFill>
-                <a:latin typeface="Malgun Gothic"/>
-                <a:ea typeface="Malgun Gothic"/>
-              </a:rPr>
-              <a:t>src/components/contents/stepC/Layering.jsx</a:t>
-            </a:r>
-          </a:p>
-        </p:txBody>
-      </p:sp>
+              <a:rPr lang="ko-KR" sz="1700" dirty="0">
+                <a:solidFill>
+                  <a:srgbClr val="17324D"/>
+                </a:solidFill>
+                <a:latin typeface="Malgun Gothic"/>
+                <a:ea typeface="Malgun Gothic"/>
+              </a:rPr>
+              <a:t>문항별 원그래프로 상세 비율 제공</a:t>
+            </a:r>
+          </a:p>
+        </p:txBody>
+      </p:sp>
+      <p:pic>
+        <p:nvPicPr>
+          <p:cNvPr id="6" name="Picture 6"/>
+          <p:cNvPicPr>
+            <a:picLocks noChangeAspect="1"/>
+          </p:cNvPicPr>
+          <p:nvPr/>
+        </p:nvPicPr>
+        <p:blipFill>
+          <a:blip r:embed="rId2"/>
+          <a:stretch>
+            <a:fillRect/>
+          </a:stretch>
+        </p:blipFill>
+        <p:spPr>
+          <a:xfrm>
+            <a:off x="4297680" y="868680"/>
+            <a:ext cx="2331720" cy="5074920"/>
+          </a:xfrm>
+          <a:prstGeom prst="rect">
+            <a:avLst/>
+          </a:prstGeom>
+          <a:ln w="12700">
+            <a:solidFill>
+              <a:srgbClr val="C7E6FF"/>
+            </a:solidFill>
+          </a:ln>
+        </p:spPr>
+      </p:pic>
+      <p:pic>
+        <p:nvPicPr>
+          <p:cNvPr id="7" name="Picture 7"/>
+          <p:cNvPicPr>
+            <a:picLocks noChangeAspect="1"/>
+          </p:cNvPicPr>
+          <p:nvPr/>
+        </p:nvPicPr>
+        <p:blipFill>
+          <a:blip r:embed="rId3"/>
+          <a:stretch>
+            <a:fillRect/>
+          </a:stretch>
+        </p:blipFill>
+        <p:spPr>
+          <a:xfrm>
+            <a:off x="6903720" y="868680"/>
+            <a:ext cx="2331720" cy="5074920"/>
+          </a:xfrm>
+          <a:prstGeom prst="rect">
+            <a:avLst/>
+          </a:prstGeom>
+          <a:ln w="12700">
+            <a:solidFill>
+              <a:srgbClr val="C7E6FF"/>
+            </a:solidFill>
+          </a:ln>
+        </p:spPr>
+      </p:pic>
+      <p:pic>
+        <p:nvPicPr>
+          <p:cNvPr id="8" name="Picture 8"/>
+          <p:cNvPicPr>
+            <a:picLocks noChangeAspect="1"/>
+          </p:cNvPicPr>
+          <p:nvPr/>
+        </p:nvPicPr>
+        <p:blipFill>
+          <a:blip r:embed="rId4"/>
+          <a:stretch>
+            <a:fillRect/>
+          </a:stretch>
+        </p:blipFill>
+        <p:spPr>
+          <a:xfrm>
+            <a:off x="9464040" y="1234440"/>
+            <a:ext cx="2194560" cy="4160520"/>
+          </a:xfrm>
+          <a:prstGeom prst="rect">
+            <a:avLst/>
+          </a:prstGeom>
+          <a:ln w="12700">
+            <a:solidFill>
+              <a:srgbClr val="C7E6FF"/>
+            </a:solidFill>
+          </a:ln>
+        </p:spPr>
+      </p:pic>
     </p:spTree>
   </p:cSld>
   <p:clrMapOvr>
@@ -1339,7 +1443,7 @@
     <p:bg>
       <p:bgPr>
         <a:solidFill>
-          <a:srgbClr val="13263A"/>
+          <a:srgbClr val="F7FBFF"/>
         </a:solidFill>
         <a:effectLst/>
       </p:bgPr>
@@ -1373,7 +1477,7 @@
             <a:avLst/>
           </a:prstGeom>
           <a:solidFill>
-            <a:srgbClr val="13263A">
+            <a:srgbClr val="F7FBFF">
               <a:alpha val="100000"/>
             </a:srgbClr>
           </a:solidFill>
@@ -1416,7 +1520,7 @@
             <a:avLst/>
           </a:prstGeom>
           <a:solidFill>
-            <a:srgbClr val="60D394">
+            <a:srgbClr val="37B7FF">
               <a:alpha val="100000"/>
             </a:srgbClr>
           </a:solidFill>
@@ -1474,12 +1578,12 @@
               <a:rPr lang="ko-KR" sz="2700" dirty="0">
                 <a:b/>
                 <a:solidFill>
-                  <a:srgbClr val="FFFFFF"/>
-                </a:solidFill>
-                <a:latin typeface="Malgun Gothic"/>
-                <a:ea typeface="Malgun Gothic"/>
-              </a:rPr>
-              <a:t>내가 구현한 핵심 가치</a:t>
+                  <a:srgbClr val="0F3D66"/>
+                </a:solidFill>
+                <a:latin typeface="Malgun Gothic"/>
+                <a:ea typeface="Malgun Gothic"/>
+              </a:rPr>
+              <a:t>Cookie Personalization</a:t>
             </a:r>
           </a:p>
         </p:txBody>
@@ -1492,8 +1596,8 @@
         </p:nvSpPr>
         <p:spPr>
           <a:xfrm>
-            <a:off x="822960" y="1143000"/>
-            <a:ext cx="10241280" cy="3840480"/>
+            <a:off x="685800" y="1005840"/>
+            <a:ext cx="3840480" cy="2743200"/>
           </a:xfrm>
           <a:prstGeom prst="rect">
             <a:avLst/>
@@ -1511,14 +1615,14 @@
               <a:buChar char="•"/>
             </a:pPr>
             <a:r>
-              <a:rPr lang="ko-KR" sz="2100" dirty="0">
-                <a:solidFill>
-                  <a:srgbClr val="EAF6FF"/>
-                </a:solidFill>
-                <a:latin typeface="Malgun Gothic"/>
-                <a:ea typeface="Malgun Gothic"/>
-              </a:rPr>
-              <a:t>데이터 저장에서 끝나는 설문이 아니라, 개인 결과/전체 통계/채팅으로 확장되는 구조 구현</a:t>
+              <a:rPr lang="ko-KR" sz="1800" dirty="0">
+                <a:solidFill>
+                  <a:srgbClr val="17324D"/>
+                </a:solidFill>
+                <a:latin typeface="Malgun Gothic"/>
+                <a:ea typeface="Malgun Gothic"/>
+              </a:rPr>
+              <a:t>isolation_user_info 쿠키 사용</a:t>
             </a:r>
           </a:p>
           <a:p>
@@ -1526,14 +1630,14 @@
               <a:buChar char="•"/>
             </a:pPr>
             <a:r>
-              <a:rPr lang="ko-KR" sz="2100" dirty="0">
-                <a:solidFill>
-                  <a:srgbClr val="EAF6FF"/>
-                </a:solidFill>
-                <a:latin typeface="Malgun Gothic"/>
-                <a:ea typeface="Malgun Gothic"/>
-              </a:rPr>
-              <a:t>AI API를 단순 호출하지 않고, 리스트 필터와 상태 머신을 결합해 운영 가능한 검열 흐름 설계</a:t>
+              <a:rPr lang="ko-KR" sz="1800" dirty="0">
+                <a:solidFill>
+                  <a:srgbClr val="17324D"/>
+                </a:solidFill>
+                <a:latin typeface="Malgun Gothic"/>
+                <a:ea typeface="Malgun Gothic"/>
+              </a:rPr>
+              <a:t>id로 개인 결과와 내 메시지 조회</a:t>
             </a:r>
           </a:p>
           <a:p>
@@ -1541,18 +1645,76 @@
               <a:buChar char="•"/>
             </a:pPr>
             <a:r>
-              <a:rPr lang="ko-KR" sz="2100" dirty="0">
-                <a:solidFill>
-                  <a:srgbClr val="EAF6FF"/>
-                </a:solidFill>
-                <a:latin typeface="Malgun Gothic"/>
-                <a:ea typeface="Malgun Gothic"/>
-              </a:rPr>
-              <a:t>시연 가능한 프론트 인터랙션과 백엔드 데이터 구조를 연결</a:t>
-            </a:r>
-          </a:p>
-        </p:txBody>
-      </p:sp>
+              <a:rPr lang="ko-KR" sz="1800" dirty="0">
+                <a:solidFill>
+                  <a:srgbClr val="17324D"/>
+                </a:solidFill>
+                <a:latin typeface="Malgun Gothic"/>
+                <a:ea typeface="Malgun Gothic"/>
+              </a:rPr>
+              <a:t>generation으로 Step2 콘텐츠 분기</a:t>
+            </a:r>
+          </a:p>
+        </p:txBody>
+      </p:sp>
+      <p:pic>
+        <p:nvPicPr>
+          <p:cNvPr id="6" name="Picture 6"/>
+          <p:cNvPicPr>
+            <a:picLocks noChangeAspect="1"/>
+          </p:cNvPicPr>
+          <p:nvPr/>
+        </p:nvPicPr>
+        <p:blipFill>
+          <a:blip r:embed="rId2"/>
+          <a:stretch>
+            <a:fillRect/>
+          </a:stretch>
+        </p:blipFill>
+        <p:spPr>
+          <a:xfrm>
+            <a:off x="4572000" y="960120"/>
+            <a:ext cx="3703320" cy="4892040"/>
+          </a:xfrm>
+          <a:prstGeom prst="rect">
+            <a:avLst/>
+          </a:prstGeom>
+          <a:ln w="12700">
+            <a:solidFill>
+              <a:srgbClr val="C7E6FF"/>
+            </a:solidFill>
+          </a:ln>
+        </p:spPr>
+      </p:pic>
+      <p:pic>
+        <p:nvPicPr>
+          <p:cNvPr id="7" name="Picture 7"/>
+          <p:cNvPicPr>
+            <a:picLocks noChangeAspect="1"/>
+          </p:cNvPicPr>
+          <p:nvPr/>
+        </p:nvPicPr>
+        <p:blipFill>
+          <a:blip r:embed="rId3"/>
+          <a:stretch>
+            <a:fillRect/>
+          </a:stretch>
+        </p:blipFill>
+        <p:spPr>
+          <a:xfrm>
+            <a:off x="8549640" y="960120"/>
+            <a:ext cx="2331720" cy="5029200"/>
+          </a:xfrm>
+          <a:prstGeom prst="rect">
+            <a:avLst/>
+          </a:prstGeom>
+          <a:ln w="12700">
+            <a:solidFill>
+              <a:srgbClr val="C7E6FF"/>
+            </a:solidFill>
+          </a:ln>
+        </p:spPr>
+      </p:pic>
     </p:spTree>
   </p:cSld>
   <p:clrMapOvr>
@@ -1567,7 +1729,7 @@
     <p:bg>
       <p:bgPr>
         <a:solidFill>
-          <a:srgbClr val="0B1020"/>
+          <a:srgbClr val="F7FBFF"/>
         </a:solidFill>
         <a:effectLst/>
       </p:bgPr>
@@ -1601,7 +1763,7 @@
             <a:avLst/>
           </a:prstGeom>
           <a:solidFill>
-            <a:srgbClr val="0B1020">
+            <a:srgbClr val="F7FBFF">
               <a:alpha val="100000"/>
             </a:srgbClr>
           </a:solidFill>
@@ -1702,12 +1864,12 @@
               <a:rPr lang="ko-KR" sz="2700" dirty="0">
                 <a:b/>
                 <a:solidFill>
-                  <a:srgbClr val="FFFFFF"/>
-                </a:solidFill>
-                <a:latin typeface="Malgun Gothic"/>
-                <a:ea typeface="Malgun Gothic"/>
-              </a:rPr>
-              <a:t>마무리</a:t>
+                  <a:srgbClr val="0F3D66"/>
+                </a:solidFill>
+                <a:latin typeface="Malgun Gothic"/>
+                <a:ea typeface="Malgun Gothic"/>
+              </a:rPr>
+              <a:t>Troubleshooting</a:t>
             </a:r>
           </a:p>
         </p:txBody>
@@ -1720,48 +1882,8 @@
         </p:nvSpPr>
         <p:spPr>
           <a:xfrm>
-            <a:off x="822960" y="1280160"/>
-            <a:ext cx="10424160" cy="1143000"/>
-          </a:xfrm>
-          <a:prstGeom prst="rect">
-            <a:avLst/>
-          </a:prstGeom>
-          <a:noFill/>
-          <a:ln>
-            <a:noFill/>
-          </a:ln>
-        </p:spPr>
-        <p:txBody>
-          <a:bodyPr wrap="square" lIns="109728" tIns="73152" rIns="109728" bIns="73152" anchor="mid"/>
-          <a:lstStyle/>
-          <a:p>
-            <a:pPr marL="0" indent="0" algn="l">
-              <a:buNone/>
-            </a:pPr>
-            <a:r>
-              <a:rPr lang="ko-KR" sz="3400" dirty="0">
-                <a:b/>
-                <a:solidFill>
-                  <a:srgbClr val="FFFFFF"/>
-                </a:solidFill>
-                <a:latin typeface="Malgun Gothic"/>
-                <a:ea typeface="Malgun Gothic"/>
-              </a:rPr>
-              <a:t>Full-stack data experience</a:t>
-            </a:r>
-          </a:p>
-        </p:txBody>
-      </p:sp>
-      <p:sp>
-        <p:nvSpPr>
-          <p:cNvPr id="6" name="Shape 6"/>
-          <p:cNvSpPr txBox="1"/>
-          <p:nvPr/>
-        </p:nvSpPr>
-        <p:spPr>
-          <a:xfrm>
-            <a:off x="914400" y="2971800"/>
-            <a:ext cx="9966960" cy="2103120"/>
+            <a:off x="822960" y="1051560"/>
+            <a:ext cx="10241280" cy="4389120"/>
           </a:xfrm>
           <a:prstGeom prst="rect">
             <a:avLst/>
@@ -1779,14 +1901,14 @@
               <a:buChar char="•"/>
             </a:pPr>
             <a:r>
-              <a:rPr lang="ko-KR" sz="2300" dirty="0">
-                <a:solidFill>
-                  <a:srgbClr val="EAF6FF"/>
-                </a:solidFill>
-                <a:latin typeface="Malgun Gothic"/>
-                <a:ea typeface="Malgun Gothic"/>
-              </a:rPr>
-              <a:t>DB 설계와 API 가공</a:t>
+              <a:rPr lang="ko-KR" sz="1900" dirty="0">
+                <a:solidFill>
+                  <a:srgbClr val="17324D"/>
+                </a:solidFill>
+                <a:latin typeface="Malgun Gothic"/>
+                <a:ea typeface="Malgun Gothic"/>
+              </a:rPr>
+              <a:t>통계 fallback 혼용 문제: API 성공 시에만 DB 데이터 사용</a:t>
             </a:r>
           </a:p>
           <a:p>
@@ -1794,14 +1916,14 @@
               <a:buChar char="•"/>
             </a:pPr>
             <a:r>
-              <a:rPr lang="ko-KR" sz="2300" dirty="0">
-                <a:solidFill>
-                  <a:srgbClr val="EAF6FF"/>
-                </a:solidFill>
-                <a:latin typeface="Malgun Gothic"/>
-                <a:ea typeface="Malgun Gothic"/>
-              </a:rPr>
-              <a:t>RAG 기반 사용자 입력 검열</a:t>
+              <a:rPr lang="ko-KR" sz="1900" dirty="0">
+                <a:solidFill>
+                  <a:srgbClr val="17324D"/>
+                </a:solidFill>
+                <a:latin typeface="Malgun Gothic"/>
+                <a:ea typeface="Malgun Gothic"/>
+              </a:rPr>
+              <a:t>SCENE_0 개인정보 문항 노출 문제: 통계/결과 화면에서 제외</a:t>
             </a:r>
           </a:p>
           <a:p>
@@ -1809,14 +1931,44 @@
               <a:buChar char="•"/>
             </a:pPr>
             <a:r>
-              <a:rPr lang="ko-KR" sz="2300" dirty="0">
-                <a:solidFill>
-                  <a:srgbClr val="EAF6FF"/>
-                </a:solidFill>
-                <a:latin typeface="Malgun Gothic"/>
-                <a:ea typeface="Malgun Gothic"/>
-              </a:rPr>
-              <a:t>모바일 시연에 최적화된 데이터 시각화</a:t>
+              <a:rPr lang="ko-KR" sz="1900" dirty="0">
+                <a:solidFill>
+                  <a:srgbClr val="17324D"/>
+                </a:solidFill>
+                <a:latin typeface="Malgun Gothic"/>
+                <a:ea typeface="Malgun Gothic"/>
+              </a:rPr>
+              <a:t>주관식 통계 분산 문제: answer_text_feeling 도입</a:t>
+            </a:r>
+          </a:p>
+          <a:p>
+            <a:pPr marL="228600" indent="-171450" algn="l">
+              <a:buChar char="•"/>
+            </a:pPr>
+            <a:r>
+              <a:rPr lang="ko-KR" sz="1900" dirty="0">
+                <a:solidFill>
+                  <a:srgbClr val="17324D"/>
+                </a:solidFill>
+                <a:latin typeface="Malgun Gothic"/>
+                <a:ea typeface="Malgun Gothic"/>
+              </a:rPr>
+              <a:t>LLM 실패/파싱 오류 문제: FAIL 기본값과 PENDING 복구</a:t>
+            </a:r>
+          </a:p>
+          <a:p>
+            <a:pPr marL="228600" indent="-171450" algn="l">
+              <a:buChar char="•"/>
+            </a:pPr>
+            <a:r>
+              <a:rPr lang="ko-KR" sz="1900" dirty="0">
+                <a:solidFill>
+                  <a:srgbClr val="17324D"/>
+                </a:solidFill>
+                <a:latin typeface="Malgun Gothic"/>
+                <a:ea typeface="Malgun Gothic"/>
+              </a:rPr>
+              <a:t>모바일 자이로/오디오 정책 문제: 사용자 제스처와 안내 UI로 흐름 재설계</a:t>
             </a:r>
           </a:p>
         </p:txBody>
@@ -1829,13 +1981,13 @@
 </p:sld>
 </file>
 
-<file path=ppt\slides\slide2.xml><?xml version="1.0" encoding="utf-8"?>
+<file path=ppt\slides\slide15.xml><?xml version="1.0" encoding="utf-8"?>
 <p:sld xmlns:a="http://schemas.openxmlformats.org/drawingml/2006/main" xmlns:r="http://schemas.openxmlformats.org/officeDocument/2006/relationships" xmlns:p="http://schemas.openxmlformats.org/presentationml/2006/main">
   <p:cSld>
     <p:bg>
       <p:bgPr>
         <a:solidFill>
-          <a:srgbClr val="101820"/>
+          <a:srgbClr val="F7FBFF"/>
         </a:solidFill>
         <a:effectLst/>
       </p:bgPr>
@@ -1869,7 +2021,7 @@
             <a:avLst/>
           </a:prstGeom>
           <a:solidFill>
-            <a:srgbClr val="101820">
+            <a:srgbClr val="F7FBFF">
               <a:alpha val="100000"/>
             </a:srgbClr>
           </a:solidFill>
@@ -1912,7 +2064,7 @@
             <a:avLst/>
           </a:prstGeom>
           <a:solidFill>
-            <a:srgbClr val="60D394">
+            <a:srgbClr val="37B7FF">
               <a:alpha val="100000"/>
             </a:srgbClr>
           </a:solidFill>
@@ -1970,12 +2122,12 @@
               <a:rPr lang="ko-KR" sz="2700" dirty="0">
                 <a:b/>
                 <a:solidFill>
-                  <a:srgbClr val="FFFFFF"/>
-                </a:solidFill>
-                <a:latin typeface="Malgun Gothic"/>
-                <a:ea typeface="Malgun Gothic"/>
-              </a:rPr>
-              <a:t>문제 정의와 해결 방향</a:t>
+                  <a:srgbClr val="0F3D66"/>
+                </a:solidFill>
+                <a:latin typeface="Malgun Gothic"/>
+                <a:ea typeface="Malgun Gothic"/>
+              </a:rPr>
+              <a:t>Troubleshooting: 로그인 없는 개인 식별</a:t>
             </a:r>
           </a:p>
         </p:txBody>
@@ -1988,82 +2140,40 @@
         </p:nvSpPr>
         <p:spPr>
           <a:xfrm>
-            <a:off x="777240" y="1234440"/>
-            <a:ext cx="5029200" cy="4297680"/>
+            <a:off x="731520" y="1051560"/>
+            <a:ext cx="2286000" cy="594360"/>
           </a:xfrm>
           <a:prstGeom prst="roundRect">
             <a:avLst/>
           </a:prstGeom>
           <a:solidFill>
-            <a:srgbClr val="1D2E44">
+            <a:srgbClr val="DDF1FF">
               <a:alpha val="100000"/>
             </a:srgbClr>
           </a:solidFill>
-          <a:ln>
-            <a:noFill/>
-          </a:ln>
-        </p:spPr>
-        <p:txBody>
-          <a:bodyPr wrap="square" lIns="109728" tIns="73152" rIns="109728" bIns="73152" anchor="top"/>
-          <a:lstStyle/>
-          <a:p>
-            <a:pPr marL="0" indent="0" algn="l">
-              <a:buNone/>
-            </a:pPr>
-            <a:r>
-              <a:rPr lang="ko-KR" sz="2000" dirty="0">
-                <a:solidFill>
-                  <a:srgbClr val="FFFFFF"/>
-                </a:solidFill>
-                <a:latin typeface="Malgun Gothic"/>
-                <a:ea typeface="Malgun Gothic"/>
-              </a:rPr>
-              <a:t>문제</a:t>
-            </a:r>
-          </a:p>
-          <a:p>
-            <a:pPr marL="0" indent="0" algn="l">
-              <a:buNone/>
-            </a:pPr>
-            <a:r>
-              <a:rPr lang="ko-KR" sz="2000" dirty="0">
-                <a:solidFill>
-                  <a:srgbClr val="FFFFFF"/>
-                </a:solidFill>
-                <a:latin typeface="Malgun Gothic"/>
-                <a:ea typeface="Malgun Gothic"/>
-              </a:rPr>
-              <a:t>설문 응답이 저장만 되고 서비스 경험으로 연결되지 않음</a:t>
-            </a:r>
-          </a:p>
-          <a:p>
-            <a:pPr marL="0" indent="0" algn="l">
-              <a:buNone/>
-            </a:pPr>
-            <a:r>
-              <a:rPr lang="ko-KR" sz="2000" dirty="0">
-                <a:solidFill>
-                  <a:srgbClr val="FFFFFF"/>
-                </a:solidFill>
-                <a:latin typeface="Malgun Gothic"/>
-                <a:ea typeface="Malgun Gothic"/>
-              </a:rPr>
-              <a:t>주관식/선택형 데이터 구조가 달라 통계화가 어려움</a:t>
-            </a:r>
-          </a:p>
-          <a:p>
-            <a:pPr marL="0" indent="0" algn="l">
-              <a:buNone/>
-            </a:pPr>
-            <a:r>
-              <a:rPr lang="ko-KR" sz="2000" dirty="0">
-                <a:solidFill>
-                  <a:srgbClr val="FFFFFF"/>
-                </a:solidFill>
-                <a:latin typeface="Malgun Gothic"/>
-                <a:ea typeface="Malgun Gothic"/>
-              </a:rPr>
-              <a:t>사용자 채팅 입력은 부적절 표현 노출 위험이 있음</a:t>
+          <a:ln w="12700">
+            <a:solidFill>
+              <a:srgbClr val="9BD6FF"/>
+            </a:solidFill>
+          </a:ln>
+        </p:spPr>
+        <p:txBody>
+          <a:bodyPr wrap="square" lIns="109728" tIns="73152" rIns="109728" bIns="73152" anchor="mid"/>
+          <a:lstStyle/>
+          <a:p>
+            <a:pPr marL="0" indent="0" algn="l">
+              <a:buNone/>
+            </a:pPr>
+            <a:r>
+              <a:rPr lang="ko-KR" sz="1600" dirty="0">
+                <a:b/>
+                <a:solidFill>
+                  <a:srgbClr val="0F3D66"/>
+                </a:solidFill>
+                <a:latin typeface="Malgun Gothic"/>
+                <a:ea typeface="Malgun Gothic"/>
+              </a:rPr>
+              <a:t>Situation</a:t>
             </a:r>
           </a:p>
         </p:txBody>
@@ -2076,19 +2186,21 @@
         </p:nvSpPr>
         <p:spPr>
           <a:xfrm>
-            <a:off x="6400800" y="1234440"/>
-            <a:ext cx="5029200" cy="4297680"/>
+            <a:off x="731520" y="1783080"/>
+            <a:ext cx="5212080" cy="1051560"/>
           </a:xfrm>
           <a:prstGeom prst="roundRect">
             <a:avLst/>
           </a:prstGeom>
           <a:solidFill>
-            <a:srgbClr val="60D394">
+            <a:srgbClr val="FFFFFF">
               <a:alpha val="100000"/>
             </a:srgbClr>
           </a:solidFill>
-          <a:ln>
-            <a:noFill/>
+          <a:ln w="12700">
+            <a:solidFill>
+              <a:srgbClr val="C7E6FF"/>
+            </a:solidFill>
           </a:ln>
         </p:spPr>
         <p:txBody>
@@ -2099,59 +2211,287 @@
               <a:buNone/>
             </a:pPr>
             <a:r>
-              <a:rPr lang="ko-KR" sz="2000" dirty="0">
-                <a:solidFill>
-                  <a:srgbClr val="101820"/>
-                </a:solidFill>
-                <a:latin typeface="Malgun Gothic"/>
-                <a:ea typeface="Malgun Gothic"/>
-              </a:rPr>
-              <a:t>해결</a:t>
-            </a:r>
-          </a:p>
-          <a:p>
-            <a:pPr marL="0" indent="0" algn="l">
-              <a:buNone/>
-            </a:pPr>
-            <a:r>
-              <a:rPr lang="ko-KR" sz="2000" dirty="0">
-                <a:solidFill>
-                  <a:srgbClr val="101820"/>
-                </a:solidFill>
-                <a:latin typeface="Malgun Gothic"/>
-                <a:ea typeface="Malgun Gothic"/>
-              </a:rPr>
-              <a:t>쿠키 기반 개인화 API 설계</a:t>
-            </a:r>
-          </a:p>
-          <a:p>
-            <a:pPr marL="0" indent="0" algn="l">
-              <a:buNone/>
-            </a:pPr>
-            <a:r>
-              <a:rPr lang="ko-KR" sz="2000" dirty="0">
-                <a:solidFill>
-                  <a:srgbClr val="101820"/>
-                </a:solidFill>
-                <a:latin typeface="Malgun Gothic"/>
-                <a:ea typeface="Malgun Gothic"/>
-              </a:rPr>
-              <a:t>DB 조인 + 서비스 계층 가공으로 통계 payload 생성</a:t>
-            </a:r>
-          </a:p>
-          <a:p>
-            <a:pPr marL="0" indent="0" algn="l">
-              <a:buNone/>
-            </a:pPr>
-            <a:r>
-              <a:rPr lang="ko-KR" sz="2000" dirty="0">
-                <a:solidFill>
-                  <a:srgbClr val="101820"/>
-                </a:solidFill>
-                <a:latin typeface="Malgun Gothic"/>
-                <a:ea typeface="Malgun Gothic"/>
-              </a:rPr>
-              <a:t>Trie 필터 + GPT RAG 검열로 PASS 메시지만 노출</a:t>
+              <a:rPr lang="ko-KR" sz="1500" dirty="0">
+                <a:solidFill>
+                  <a:srgbClr val="17324D"/>
+                </a:solidFill>
+                <a:latin typeface="Malgun Gothic"/>
+                <a:ea typeface="Malgun Gothic"/>
+              </a:rPr>
+              <a:t>고립 척도 검사 결과를 재방문 시 다시 보여주려면 사용자 식별 Key가 필요했지만, 오픈형 콘텐츠라 로그인 체계가 없었습니다.</a:t>
+            </a:r>
+          </a:p>
+        </p:txBody>
+      </p:sp>
+      <p:sp>
+        <p:nvSpPr>
+          <p:cNvPr id="7" name="Shape 7"/>
+          <p:cNvSpPr txBox="1"/>
+          <p:nvPr/>
+        </p:nvSpPr>
+        <p:spPr>
+          <a:xfrm>
+            <a:off x="6263640" y="1051560"/>
+            <a:ext cx="2286000" cy="594360"/>
+          </a:xfrm>
+          <a:prstGeom prst="roundRect">
+            <a:avLst/>
+          </a:prstGeom>
+          <a:solidFill>
+            <a:srgbClr val="DDF1FF">
+              <a:alpha val="100000"/>
+            </a:srgbClr>
+          </a:solidFill>
+          <a:ln w="12700">
+            <a:solidFill>
+              <a:srgbClr val="9BD6FF"/>
+            </a:solidFill>
+          </a:ln>
+        </p:spPr>
+        <p:txBody>
+          <a:bodyPr wrap="square" lIns="109728" tIns="73152" rIns="109728" bIns="73152" anchor="mid"/>
+          <a:lstStyle/>
+          <a:p>
+            <a:pPr marL="0" indent="0" algn="l">
+              <a:buNone/>
+            </a:pPr>
+            <a:r>
+              <a:rPr lang="ko-KR" sz="1600" dirty="0">
+                <a:b/>
+                <a:solidFill>
+                  <a:srgbClr val="0F3D66"/>
+                </a:solidFill>
+                <a:latin typeface="Malgun Gothic"/>
+                <a:ea typeface="Malgun Gothic"/>
+              </a:rPr>
+              <a:t>Task</a:t>
+            </a:r>
+          </a:p>
+        </p:txBody>
+      </p:sp>
+      <p:sp>
+        <p:nvSpPr>
+          <p:cNvPr id="8" name="Shape 8"/>
+          <p:cNvSpPr txBox="1"/>
+          <p:nvPr/>
+        </p:nvSpPr>
+        <p:spPr>
+          <a:xfrm>
+            <a:off x="6263640" y="1783080"/>
+            <a:ext cx="5212080" cy="1051560"/>
+          </a:xfrm>
+          <a:prstGeom prst="roundRect">
+            <a:avLst/>
+          </a:prstGeom>
+          <a:solidFill>
+            <a:srgbClr val="FFFFFF">
+              <a:alpha val="100000"/>
+            </a:srgbClr>
+          </a:solidFill>
+          <a:ln w="12700">
+            <a:solidFill>
+              <a:srgbClr val="C7E6FF"/>
+            </a:solidFill>
+          </a:ln>
+        </p:spPr>
+        <p:txBody>
+          <a:bodyPr wrap="square" lIns="109728" tIns="73152" rIns="109728" bIns="73152" anchor="top"/>
+          <a:lstStyle/>
+          <a:p>
+            <a:pPr marL="0" indent="0" algn="l">
+              <a:buNone/>
+            </a:pPr>
+            <a:r>
+              <a:rPr lang="ko-KR" sz="1500" dirty="0">
+                <a:solidFill>
+                  <a:srgbClr val="17324D"/>
+                </a:solidFill>
+                <a:latin typeface="Malgun Gothic"/>
+                <a:ea typeface="Malgun Gothic"/>
+              </a:rPr>
+              <a:t>전화번호/이메일 수집은 접근성을 해치고 심리적 거부감을 만들 수 있어, 최소 정보로 식별 가능한 구조가 필요했습니다.</a:t>
+            </a:r>
+          </a:p>
+        </p:txBody>
+      </p:sp>
+      <p:sp>
+        <p:nvSpPr>
+          <p:cNvPr id="9" name="Shape 9"/>
+          <p:cNvSpPr txBox="1"/>
+          <p:nvPr/>
+        </p:nvSpPr>
+        <p:spPr>
+          <a:xfrm>
+            <a:off x="731520" y="3246120"/>
+            <a:ext cx="2286000" cy="594360"/>
+          </a:xfrm>
+          <a:prstGeom prst="roundRect">
+            <a:avLst/>
+          </a:prstGeom>
+          <a:solidFill>
+            <a:srgbClr val="DDF1FF">
+              <a:alpha val="100000"/>
+            </a:srgbClr>
+          </a:solidFill>
+          <a:ln w="12700">
+            <a:solidFill>
+              <a:srgbClr val="9BD6FF"/>
+            </a:solidFill>
+          </a:ln>
+        </p:spPr>
+        <p:txBody>
+          <a:bodyPr wrap="square" lIns="109728" tIns="73152" rIns="109728" bIns="73152" anchor="mid"/>
+          <a:lstStyle/>
+          <a:p>
+            <a:pPr marL="0" indent="0" algn="l">
+              <a:buNone/>
+            </a:pPr>
+            <a:r>
+              <a:rPr lang="ko-KR" sz="1600" dirty="0">
+                <a:b/>
+                <a:solidFill>
+                  <a:srgbClr val="0F3D66"/>
+                </a:solidFill>
+                <a:latin typeface="Malgun Gothic"/>
+                <a:ea typeface="Malgun Gothic"/>
+              </a:rPr>
+              <a:t>Action</a:t>
+            </a:r>
+          </a:p>
+        </p:txBody>
+      </p:sp>
+      <p:sp>
+        <p:nvSpPr>
+          <p:cNvPr id="10" name="Shape 10"/>
+          <p:cNvSpPr txBox="1"/>
+          <p:nvPr/>
+        </p:nvSpPr>
+        <p:spPr>
+          <a:xfrm>
+            <a:off x="731520" y="3977640"/>
+            <a:ext cx="5212080" cy="1325880"/>
+          </a:xfrm>
+          <a:prstGeom prst="roundRect">
+            <a:avLst/>
+          </a:prstGeom>
+          <a:solidFill>
+            <a:srgbClr val="FFFFFF">
+              <a:alpha val="100000"/>
+            </a:srgbClr>
+          </a:solidFill>
+          <a:ln w="12700">
+            <a:solidFill>
+              <a:srgbClr val="C7E6FF"/>
+            </a:solidFill>
+          </a:ln>
+        </p:spPr>
+        <p:txBody>
+          <a:bodyPr wrap="square" lIns="109728" tIns="73152" rIns="109728" bIns="73152" anchor="top"/>
+          <a:lstStyle/>
+          <a:p>
+            <a:pPr marL="0" indent="0" algn="l">
+              <a:buNone/>
+            </a:pPr>
+            <a:r>
+              <a:rPr lang="ko-KR" sz="1500" dirty="0">
+                <a:solidFill>
+                  <a:srgbClr val="17324D"/>
+                </a:solidFill>
+                <a:latin typeface="Malgun Gothic"/>
+                <a:ea typeface="Malgun Gothic"/>
+              </a:rPr>
+              <a:t>이메일/전화번호 수집을 철회하고 이름, 나이, 성별 조합을 복합 키로 활용했습니다. 완벽한 유일성보다 콘텐츠의 가벼운 UX와 데이터 매칭 균형을 우선했습니다.</a:t>
+            </a:r>
+          </a:p>
+        </p:txBody>
+      </p:sp>
+      <p:sp>
+        <p:nvSpPr>
+          <p:cNvPr id="11" name="Shape 11"/>
+          <p:cNvSpPr txBox="1"/>
+          <p:nvPr/>
+        </p:nvSpPr>
+        <p:spPr>
+          <a:xfrm>
+            <a:off x="6263640" y="3246120"/>
+            <a:ext cx="2286000" cy="594360"/>
+          </a:xfrm>
+          <a:prstGeom prst="roundRect">
+            <a:avLst/>
+          </a:prstGeom>
+          <a:solidFill>
+            <a:srgbClr val="DDF1FF">
+              <a:alpha val="100000"/>
+            </a:srgbClr>
+          </a:solidFill>
+          <a:ln w="12700">
+            <a:solidFill>
+              <a:srgbClr val="9BD6FF"/>
+            </a:solidFill>
+          </a:ln>
+        </p:spPr>
+        <p:txBody>
+          <a:bodyPr wrap="square" lIns="109728" tIns="73152" rIns="109728" bIns="73152" anchor="mid"/>
+          <a:lstStyle/>
+          <a:p>
+            <a:pPr marL="0" indent="0" algn="l">
+              <a:buNone/>
+            </a:pPr>
+            <a:r>
+              <a:rPr lang="ko-KR" sz="1600" dirty="0">
+                <a:b/>
+                <a:solidFill>
+                  <a:srgbClr val="0F3D66"/>
+                </a:solidFill>
+                <a:latin typeface="Malgun Gothic"/>
+                <a:ea typeface="Malgun Gothic"/>
+              </a:rPr>
+              <a:t>Result</a:t>
+            </a:r>
+          </a:p>
+        </p:txBody>
+      </p:sp>
+      <p:sp>
+        <p:nvSpPr>
+          <p:cNvPr id="12" name="Shape 12"/>
+          <p:cNvSpPr txBox="1"/>
+          <p:nvPr/>
+        </p:nvSpPr>
+        <p:spPr>
+          <a:xfrm>
+            <a:off x="6263640" y="3977640"/>
+            <a:ext cx="5212080" cy="1325880"/>
+          </a:xfrm>
+          <a:prstGeom prst="roundRect">
+            <a:avLst/>
+          </a:prstGeom>
+          <a:solidFill>
+            <a:srgbClr val="FFFFFF">
+              <a:alpha val="100000"/>
+            </a:srgbClr>
+          </a:solidFill>
+          <a:ln w="12700">
+            <a:solidFill>
+              <a:srgbClr val="C7E6FF"/>
+            </a:solidFill>
+          </a:ln>
+        </p:spPr>
+        <p:txBody>
+          <a:bodyPr wrap="square" lIns="109728" tIns="73152" rIns="109728" bIns="73152" anchor="top"/>
+          <a:lstStyle/>
+          <a:p>
+            <a:pPr marL="0" indent="0" algn="l">
+              <a:buNone/>
+            </a:pPr>
+            <a:r>
+              <a:rPr lang="ko-KR" sz="1500" dirty="0">
+                <a:solidFill>
+                  <a:srgbClr val="17324D"/>
+                </a:solidFill>
+                <a:latin typeface="Malgun Gothic"/>
+                <a:ea typeface="Malgun Gothic"/>
+              </a:rPr>
+              <a:t>개인정보 부담을 줄여 참여 허들을 낮추고, 복잡한 가입 없이도 재방문 결과 조회와 공유가 가능한 최소 개인화 흐름을 확보했습니다.</a:t>
             </a:r>
           </a:p>
         </p:txBody>
@@ -2164,13 +2504,13 @@
 </p:sld>
 </file>
 
-<file path=ppt\slides\slide3.xml><?xml version="1.0" encoding="utf-8"?>
+<file path=ppt\slides\slide16.xml><?xml version="1.0" encoding="utf-8"?>
 <p:sld xmlns:a="http://schemas.openxmlformats.org/drawingml/2006/main" xmlns:r="http://schemas.openxmlformats.org/officeDocument/2006/relationships" xmlns:p="http://schemas.openxmlformats.org/presentationml/2006/main">
   <p:cSld>
     <p:bg>
       <p:bgPr>
         <a:solidFill>
-          <a:srgbClr val="13263A"/>
+          <a:srgbClr val="F7FBFF"/>
         </a:solidFill>
         <a:effectLst/>
       </p:bgPr>
@@ -2204,7 +2544,7 @@
             <a:avLst/>
           </a:prstGeom>
           <a:solidFill>
-            <a:srgbClr val="13263A">
+            <a:srgbClr val="F7FBFF">
               <a:alpha val="100000"/>
             </a:srgbClr>
           </a:solidFill>
@@ -2305,12 +2645,12 @@
               <a:rPr lang="ko-KR" sz="2700" dirty="0">
                 <a:b/>
                 <a:solidFill>
-                  <a:srgbClr val="FFFFFF"/>
-                </a:solidFill>
-                <a:latin typeface="Malgun Gothic"/>
-                <a:ea typeface="Malgun Gothic"/>
-              </a:rPr>
-              <a:t>시스템 아키텍처</a:t>
+                  <a:srgbClr val="0F3D66"/>
+                </a:solidFill>
+                <a:latin typeface="Malgun Gothic"/>
+                <a:ea typeface="Malgun Gothic"/>
+              </a:rPr>
+              <a:t>Code Capture Index</a:t>
             </a:r>
           </a:p>
         </p:txBody>
@@ -2323,184 +2663,8 @@
         </p:nvSpPr>
         <p:spPr>
           <a:xfrm>
-            <a:off x="640080" y="1143000"/>
-            <a:ext cx="2011680" cy="777240"/>
-          </a:xfrm>
-          <a:prstGeom prst="roundRect">
-            <a:avLst/>
-          </a:prstGeom>
-          <a:solidFill>
-            <a:srgbClr val="37B7FF">
-              <a:alpha val="100000"/>
-            </a:srgbClr>
-          </a:solidFill>
-          <a:ln>
-            <a:noFill/>
-          </a:ln>
-        </p:spPr>
-        <p:txBody>
-          <a:bodyPr wrap="square" lIns="109728" tIns="73152" rIns="109728" bIns="73152" anchor="mid"/>
-          <a:lstStyle/>
-          <a:p>
-            <a:pPr marL="0" indent="0" algn="l">
-              <a:buNone/>
-            </a:pPr>
-            <a:r>
-              <a:rPr lang="ko-KR" sz="1700" dirty="0">
-                <a:b/>
-                <a:solidFill>
-                  <a:srgbClr val="101820"/>
-                </a:solidFill>
-                <a:latin typeface="Malgun Gothic"/>
-                <a:ea typeface="Malgun Gothic"/>
-              </a:rPr>
-              <a:t>React Step UI</a:t>
-            </a:r>
-          </a:p>
-        </p:txBody>
-      </p:sp>
-      <p:sp>
-        <p:nvSpPr>
-          <p:cNvPr id="6" name="Shape 6"/>
-          <p:cNvSpPr txBox="1"/>
-          <p:nvPr/>
-        </p:nvSpPr>
-        <p:spPr>
-          <a:xfrm>
-            <a:off x="3246120" y="1143000"/>
-            <a:ext cx="2011680" cy="777240"/>
-          </a:xfrm>
-          <a:prstGeom prst="roundRect">
-            <a:avLst/>
-          </a:prstGeom>
-          <a:solidFill>
-            <a:srgbClr val="60D394">
-              <a:alpha val="100000"/>
-            </a:srgbClr>
-          </a:solidFill>
-          <a:ln>
-            <a:noFill/>
-          </a:ln>
-        </p:spPr>
-        <p:txBody>
-          <a:bodyPr wrap="square" lIns="109728" tIns="73152" rIns="109728" bIns="73152" anchor="mid"/>
-          <a:lstStyle/>
-          <a:p>
-            <a:pPr marL="0" indent="0" algn="l">
-              <a:buNone/>
-            </a:pPr>
-            <a:r>
-              <a:rPr lang="ko-KR" sz="1700" dirty="0">
-                <a:b/>
-                <a:solidFill>
-                  <a:srgbClr val="101820"/>
-                </a:solidFill>
-                <a:latin typeface="Malgun Gothic"/>
-                <a:ea typeface="Malgun Gothic"/>
-              </a:rPr>
-              <a:t>Express API</a:t>
-            </a:r>
-          </a:p>
-        </p:txBody>
-      </p:sp>
-      <p:sp>
-        <p:nvSpPr>
-          <p:cNvPr id="7" name="Shape 7"/>
-          <p:cNvSpPr txBox="1"/>
-          <p:nvPr/>
-        </p:nvSpPr>
-        <p:spPr>
-          <a:xfrm>
-            <a:off x="5852160" y="1143000"/>
-            <a:ext cx="2011680" cy="777240"/>
-          </a:xfrm>
-          <a:prstGeom prst="roundRect">
-            <a:avLst/>
-          </a:prstGeom>
-          <a:solidFill>
-            <a:srgbClr val="FFD166">
-              <a:alpha val="100000"/>
-            </a:srgbClr>
-          </a:solidFill>
-          <a:ln>
-            <a:noFill/>
-          </a:ln>
-        </p:spPr>
-        <p:txBody>
-          <a:bodyPr wrap="square" lIns="109728" tIns="73152" rIns="109728" bIns="73152" anchor="mid"/>
-          <a:lstStyle/>
-          <a:p>
-            <a:pPr marL="0" indent="0" algn="l">
-              <a:buNone/>
-            </a:pPr>
-            <a:r>
-              <a:rPr lang="ko-KR" sz="1700" dirty="0">
-                <a:b/>
-                <a:solidFill>
-                  <a:srgbClr val="101820"/>
-                </a:solidFill>
-                <a:latin typeface="Malgun Gothic"/>
-                <a:ea typeface="Malgun Gothic"/>
-              </a:rPr>
-              <a:t>Aiven MySQL</a:t>
-            </a:r>
-          </a:p>
-        </p:txBody>
-      </p:sp>
-      <p:sp>
-        <p:nvSpPr>
-          <p:cNvPr id="8" name="Shape 8"/>
-          <p:cNvSpPr txBox="1"/>
-          <p:nvPr/>
-        </p:nvSpPr>
-        <p:spPr>
-          <a:xfrm>
-            <a:off x="8458200" y="1143000"/>
-            <a:ext cx="2011680" cy="777240"/>
-          </a:xfrm>
-          <a:prstGeom prst="roundRect">
-            <a:avLst/>
-          </a:prstGeom>
-          <a:solidFill>
-            <a:srgbClr val="FFFFFF">
-              <a:alpha val="100000"/>
-            </a:srgbClr>
-          </a:solidFill>
-          <a:ln>
-            <a:noFill/>
-          </a:ln>
-        </p:spPr>
-        <p:txBody>
-          <a:bodyPr wrap="square" lIns="109728" tIns="73152" rIns="109728" bIns="73152" anchor="mid"/>
-          <a:lstStyle/>
-          <a:p>
-            <a:pPr marL="0" indent="0" algn="l">
-              <a:buNone/>
-            </a:pPr>
-            <a:r>
-              <a:rPr lang="ko-KR" sz="1700" dirty="0">
-                <a:b/>
-                <a:solidFill>
-                  <a:srgbClr val="101820"/>
-                </a:solidFill>
-                <a:latin typeface="Malgun Gothic"/>
-                <a:ea typeface="Malgun Gothic"/>
-              </a:rPr>
-              <a:t>OpenAI API</a:t>
-            </a:r>
-          </a:p>
-        </p:txBody>
-      </p:sp>
-      <p:sp>
-        <p:nvSpPr>
-          <p:cNvPr id="9" name="Shape 9"/>
-          <p:cNvSpPr txBox="1"/>
-          <p:nvPr/>
-        </p:nvSpPr>
-        <p:spPr>
-          <a:xfrm>
-            <a:off x="822960" y="2743200"/>
-            <a:ext cx="10058400" cy="2377440"/>
+            <a:off x="594360" y="914400"/>
+            <a:ext cx="5486400" cy="5029200"/>
           </a:xfrm>
           <a:prstGeom prst="rect">
             <a:avLst/>
@@ -2518,14 +2682,14 @@
               <a:buChar char="•"/>
             </a:pPr>
             <a:r>
-              <a:rPr lang="ko-KR" sz="1900" dirty="0">
-                <a:solidFill>
-                  <a:srgbClr val="EAF6FF"/>
-                </a:solidFill>
-                <a:latin typeface="Malgun Gothic"/>
-                <a:ea typeface="Malgun Gothic"/>
-              </a:rPr>
-              <a:t>프론트는 설문/개인화/통계/채팅 화면을 담당</a:t>
+              <a:rPr lang="ko-KR" sz="1600" dirty="0">
+                <a:solidFill>
+                  <a:srgbClr val="17324D"/>
+                </a:solidFill>
+                <a:latin typeface="Malgun Gothic"/>
+                <a:ea typeface="Malgun Gothic"/>
+              </a:rPr>
+              <a:t>DB: 01_db_connection_pool.png</a:t>
             </a:r>
           </a:p>
           <a:p>
@@ -2533,14 +2697,14 @@
               <a:buChar char="•"/>
             </a:pPr>
             <a:r>
-              <a:rPr lang="ko-KR" sz="1900" dirty="0">
-                <a:solidFill>
-                  <a:srgbClr val="EAF6FF"/>
-                </a:solidFill>
-                <a:latin typeface="Malgun Gothic"/>
-                <a:ea typeface="Malgun Gothic"/>
-              </a:rPr>
-              <a:t>백엔드는 DB row를 목적별 응답 구조로 재가공</a:t>
+              <a:rPr lang="ko-KR" sz="1600" dirty="0">
+                <a:solidFill>
+                  <a:srgbClr val="17324D"/>
+                </a:solidFill>
+                <a:latin typeface="Malgun Gothic"/>
+                <a:ea typeface="Malgun Gothic"/>
+              </a:rPr>
+              <a:t>개인 결과: 02_personal_survey_join.png</a:t>
             </a:r>
           </a:p>
           <a:p>
@@ -2548,84 +2712,177 @@
               <a:buChar char="•"/>
             </a:pPr>
             <a:r>
-              <a:rPr lang="ko-KR" sz="1900" dirty="0">
-                <a:solidFill>
-                  <a:srgbClr val="EAF6FF"/>
-                </a:solidFill>
-                <a:latin typeface="Malgun Gothic"/>
-                <a:ea typeface="Malgun Gothic"/>
-              </a:rPr>
-              <a:t>RAG 검열은 외부 AI API 실패를 고려해 fail-safe 정책 적용</a:t>
-            </a:r>
-          </a:p>
-        </p:txBody>
-      </p:sp>
-      <p:cxnSp>
-        <p:nvCxnSpPr>
-          <p:cNvPr id="10" name="Arrow 10"/>
-          <p:cNvCxnSpPr/>
-          <p:nvPr/>
-        </p:nvCxnSpPr>
-        <p:spPr>
-          <a:xfrm>
-            <a:off x="2651760" y="1527048"/>
-            <a:ext cx="594360" cy="0"/>
-          </a:xfrm>
-          <a:prstGeom prst="line">
-            <a:avLst/>
-          </a:prstGeom>
-          <a:ln w="25400">
-            <a:solidFill>
-              <a:srgbClr val="EAF6FF"/>
-            </a:solidFill>
-            <a:tailEnd type="triangle"/>
-          </a:ln>
-        </p:spPr>
-      </p:cxnSp>
-      <p:cxnSp>
-        <p:nvCxnSpPr>
-          <p:cNvPr id="11" name="Arrow 11"/>
-          <p:cNvCxnSpPr/>
-          <p:nvPr/>
-        </p:nvCxnSpPr>
-        <p:spPr>
-          <a:xfrm>
-            <a:off x="5257800" y="1527048"/>
-            <a:ext cx="594360" cy="0"/>
-          </a:xfrm>
-          <a:prstGeom prst="line">
-            <a:avLst/>
-          </a:prstGeom>
-          <a:ln w="25400">
-            <a:solidFill>
-              <a:srgbClr val="EAF6FF"/>
-            </a:solidFill>
-            <a:tailEnd type="triangle"/>
-          </a:ln>
-        </p:spPr>
-      </p:cxnSp>
-      <p:cxnSp>
-        <p:nvCxnSpPr>
-          <p:cNvPr id="12" name="Arrow 12"/>
-          <p:cNvCxnSpPr/>
-          <p:nvPr/>
-        </p:nvCxnSpPr>
-        <p:spPr>
-          <a:xfrm>
-            <a:off x="7863840" y="1527048"/>
-            <a:ext cx="594360" cy="0"/>
-          </a:xfrm>
-          <a:prstGeom prst="line">
-            <a:avLst/>
-          </a:prstGeom>
-          <a:ln w="25400">
-            <a:solidFill>
-              <a:srgbClr val="EAF6FF"/>
-            </a:solidFill>
-            <a:tailEnd type="triangle"/>
-          </a:ln>
-        </p:spPr>
-      </p:cxnSp>
+              <a:rPr lang="ko-KR" sz="1600" dirty="0">
+                <a:solidFill>
+                  <a:srgbClr val="17324D"/>
+                </a:solidFill>
+                <a:latin typeface="Malgun Gothic"/>
+                <a:ea typeface="Malgun Gothic"/>
+              </a:rPr>
+              <a:t>통계 SQL: 03_statistics_sql_grouping.png</a:t>
+            </a:r>
+          </a:p>
+          <a:p>
+            <a:pPr marL="228600" indent="-171450" algn="l">
+              <a:buChar char="•"/>
+            </a:pPr>
+            <a:r>
+              <a:rPr lang="ko-KR" sz="1600" dirty="0">
+                <a:solidFill>
+                  <a:srgbClr val="17324D"/>
+                </a:solidFill>
+                <a:latin typeface="Malgun Gothic"/>
+                <a:ea typeface="Malgun Gothic"/>
+              </a:rPr>
+              <a:t>통계 계산: 04, 05</a:t>
+            </a:r>
+          </a:p>
+          <a:p>
+            <a:pPr marL="228600" indent="-171450" algn="l">
+              <a:buChar char="•"/>
+            </a:pPr>
+            <a:r>
+              <a:rPr lang="ko-KR" sz="1600" dirty="0">
+                <a:solidFill>
+                  <a:srgbClr val="17324D"/>
+                </a:solidFill>
+                <a:latin typeface="Malgun Gothic"/>
+                <a:ea typeface="Malgun Gothic"/>
+              </a:rPr>
+              <a:t>RAG/검열: 06, 07, 08, 09, 10</a:t>
+            </a:r>
+          </a:p>
+          <a:p>
+            <a:pPr marL="228600" indent="-171450" algn="l">
+              <a:buChar char="•"/>
+            </a:pPr>
+            <a:r>
+              <a:rPr lang="ko-KR" sz="1600" dirty="0">
+                <a:solidFill>
+                  <a:srgbClr val="17324D"/>
+                </a:solidFill>
+                <a:latin typeface="Malgun Gothic"/>
+                <a:ea typeface="Malgun Gothic"/>
+              </a:rPr>
+              <a:t>Trie: 11, 12</a:t>
+            </a:r>
+          </a:p>
+        </p:txBody>
+      </p:sp>
+      <p:sp>
+        <p:nvSpPr>
+          <p:cNvPr id="6" name="Shape 6"/>
+          <p:cNvSpPr txBox="1"/>
+          <p:nvPr/>
+        </p:nvSpPr>
+        <p:spPr>
+          <a:xfrm>
+            <a:off x="6309360" y="914400"/>
+            <a:ext cx="5303520" cy="5029200"/>
+          </a:xfrm>
+          <a:prstGeom prst="rect">
+            <a:avLst/>
+          </a:prstGeom>
+          <a:noFill/>
+          <a:ln>
+            <a:noFill/>
+          </a:ln>
+        </p:spPr>
+        <p:txBody>
+          <a:bodyPr wrap="square" lIns="45720" tIns="45720" rIns="45720" bIns="45720" anchor="top"/>
+          <a:lstStyle/>
+          <a:p>
+            <a:pPr marL="228600" indent="-171450" algn="l">
+              <a:buChar char="•"/>
+            </a:pPr>
+            <a:r>
+              <a:rPr lang="ko-KR" sz="1600" dirty="0">
+                <a:solidFill>
+                  <a:srgbClr val="17324D"/>
+                </a:solidFill>
+                <a:latin typeface="Malgun Gothic"/>
+                <a:ea typeface="Malgun Gothic"/>
+              </a:rPr>
+              <a:t>3D: 13_step2_3d_bubbles_useframe.png</a:t>
+            </a:r>
+          </a:p>
+          <a:p>
+            <a:pPr marL="228600" indent="-171450" algn="l">
+              <a:buChar char="•"/>
+            </a:pPr>
+            <a:r>
+              <a:rPr lang="ko-KR" sz="1600" dirty="0">
+                <a:solidFill>
+                  <a:srgbClr val="17324D"/>
+                </a:solidFill>
+                <a:latin typeface="Malgun Gothic"/>
+                <a:ea typeface="Malgun Gothic"/>
+              </a:rPr>
+              <a:t>3D Canvas: 14_step2_3d_canvas_scene.png</a:t>
+            </a:r>
+          </a:p>
+          <a:p>
+            <a:pPr marL="228600" indent="-171450" algn="l">
+              <a:buChar char="•"/>
+            </a:pPr>
+            <a:r>
+              <a:rPr lang="ko-KR" sz="1600" dirty="0">
+                <a:solidFill>
+                  <a:srgbClr val="17324D"/>
+                </a:solidFill>
+                <a:latin typeface="Malgun Gothic"/>
+                <a:ea typeface="Malgun Gothic"/>
+              </a:rPr>
+              <a:t>자이로: 15_step2_mobile_gyro_permission.png</a:t>
+            </a:r>
+          </a:p>
+          <a:p>
+            <a:pPr marL="228600" indent="-171450" algn="l">
+              <a:buChar char="•"/>
+            </a:pPr>
+            <a:r>
+              <a:rPr lang="ko-KR" sz="1600" dirty="0">
+                <a:solidFill>
+                  <a:srgbClr val="17324D"/>
+                </a:solidFill>
+                <a:latin typeface="Malgun Gothic"/>
+                <a:ea typeface="Malgun Gothic"/>
+              </a:rPr>
+              <a:t>채팅 개인화: 16_step3_cookie_chat_personalization.png</a:t>
+            </a:r>
+          </a:p>
+          <a:p>
+            <a:pPr marL="228600" indent="-171450" algn="l">
+              <a:buChar char="•"/>
+            </a:pPr>
+            <a:r>
+              <a:rPr lang="ko-KR" sz="1600" dirty="0">
+                <a:solidFill>
+                  <a:srgbClr val="17324D"/>
+                </a:solidFill>
+                <a:latin typeface="Malgun Gothic"/>
+                <a:ea typeface="Malgun Gothic"/>
+              </a:rPr>
+              <a:t>Matter 통계: 17_step3_matter_participant_particles.png</a:t>
+            </a:r>
+          </a:p>
+          <a:p>
+            <a:pPr marL="228600" indent="-171450" algn="l">
+              <a:buChar char="•"/>
+            </a:pPr>
+            <a:r>
+              <a:rPr lang="ko-KR" sz="1600" dirty="0">
+                <a:solidFill>
+                  <a:srgbClr val="17324D"/>
+                </a:solidFill>
+                <a:latin typeface="Malgun Gothic"/>
+                <a:ea typeface="Malgun Gothic"/>
+              </a:rPr>
+              <a:t>화면 캡처: screen_01 ~ screen_08</a:t>
+            </a:r>
+          </a:p>
+        </p:txBody>
+      </p:sp>
     </p:spTree>
   </p:cSld>
   <p:clrMapOvr>
@@ -2634,13 +2891,13 @@
 </p:sld>
 </file>
 
-<file path=ppt\slides\slide4.xml><?xml version="1.0" encoding="utf-8"?>
+<file path=ppt\slides\slide2.xml><?xml version="1.0" encoding="utf-8"?>
 <p:sld xmlns:a="http://schemas.openxmlformats.org/drawingml/2006/main" xmlns:r="http://schemas.openxmlformats.org/officeDocument/2006/relationships" xmlns:p="http://schemas.openxmlformats.org/presentationml/2006/main">
   <p:cSld>
     <p:bg>
       <p:bgPr>
         <a:solidFill>
-          <a:srgbClr val="101820"/>
+          <a:srgbClr val="F7FBFF"/>
         </a:solidFill>
         <a:effectLst/>
       </p:bgPr>
@@ -2674,7 +2931,7 @@
             <a:avLst/>
           </a:prstGeom>
           <a:solidFill>
-            <a:srgbClr val="101820">
+            <a:srgbClr val="F7FBFF">
               <a:alpha val="100000"/>
             </a:srgbClr>
           </a:solidFill>
@@ -2717,7 +2974,7 @@
             <a:avLst/>
           </a:prstGeom>
           <a:solidFill>
-            <a:srgbClr val="FFD166">
+            <a:srgbClr val="37B7FF">
               <a:alpha val="100000"/>
             </a:srgbClr>
           </a:solidFill>
@@ -2775,12 +3032,12 @@
               <a:rPr lang="ko-KR" sz="2700" dirty="0">
                 <a:b/>
                 <a:solidFill>
-                  <a:srgbClr val="FFFFFF"/>
-                </a:solidFill>
-                <a:latin typeface="Malgun Gothic"/>
-                <a:ea typeface="Malgun Gothic"/>
-              </a:rPr>
-              <a:t>DB 모델링과 조인 전략</a:t>
+                  <a:srgbClr val="0F3D66"/>
+                </a:solidFill>
+                <a:latin typeface="Malgun Gothic"/>
+                <a:ea typeface="Malgun Gothic"/>
+              </a:rPr>
+              <a:t>System Architecture</a:t>
             </a:r>
           </a:p>
         </p:txBody>
@@ -2793,8 +3050,192 @@
         </p:nvSpPr>
         <p:spPr>
           <a:xfrm>
-            <a:off x="685800" y="1143000"/>
-            <a:ext cx="5486400" cy="4389120"/>
+            <a:off x="731520" y="1143000"/>
+            <a:ext cx="2011680" cy="777240"/>
+          </a:xfrm>
+          <a:prstGeom prst="roundRect">
+            <a:avLst/>
+          </a:prstGeom>
+          <a:solidFill>
+            <a:srgbClr val="DDF1FF">
+              <a:alpha val="100000"/>
+            </a:srgbClr>
+          </a:solidFill>
+          <a:ln w="12700">
+            <a:solidFill>
+              <a:srgbClr val="9BD6FF"/>
+            </a:solidFill>
+          </a:ln>
+        </p:spPr>
+        <p:txBody>
+          <a:bodyPr wrap="square" lIns="109728" tIns="73152" rIns="109728" bIns="73152" anchor="mid"/>
+          <a:lstStyle/>
+          <a:p>
+            <a:pPr marL="0" indent="0" algn="l">
+              <a:buNone/>
+            </a:pPr>
+            <a:r>
+              <a:rPr lang="ko-KR" sz="1800" dirty="0">
+                <a:b/>
+                <a:solidFill>
+                  <a:srgbClr val="0F3D66"/>
+                </a:solidFill>
+                <a:latin typeface="Malgun Gothic"/>
+                <a:ea typeface="Malgun Gothic"/>
+              </a:rPr>
+              <a:t>Step UI</a:t>
+            </a:r>
+          </a:p>
+        </p:txBody>
+      </p:sp>
+      <p:sp>
+        <p:nvSpPr>
+          <p:cNvPr id="6" name="Shape 6"/>
+          <p:cNvSpPr txBox="1"/>
+          <p:nvPr/>
+        </p:nvSpPr>
+        <p:spPr>
+          <a:xfrm>
+            <a:off x="3246120" y="1143000"/>
+            <a:ext cx="2011680" cy="777240"/>
+          </a:xfrm>
+          <a:prstGeom prst="roundRect">
+            <a:avLst/>
+          </a:prstGeom>
+          <a:solidFill>
+            <a:srgbClr val="EAF7FF">
+              <a:alpha val="100000"/>
+            </a:srgbClr>
+          </a:solidFill>
+          <a:ln w="12700">
+            <a:solidFill>
+              <a:srgbClr val="9BD6FF"/>
+            </a:solidFill>
+          </a:ln>
+        </p:spPr>
+        <p:txBody>
+          <a:bodyPr wrap="square" lIns="109728" tIns="73152" rIns="109728" bIns="73152" anchor="mid"/>
+          <a:lstStyle/>
+          <a:p>
+            <a:pPr marL="0" indent="0" algn="l">
+              <a:buNone/>
+            </a:pPr>
+            <a:r>
+              <a:rPr lang="ko-KR" sz="1800" dirty="0">
+                <a:b/>
+                <a:solidFill>
+                  <a:srgbClr val="0F3D66"/>
+                </a:solidFill>
+                <a:latin typeface="Malgun Gothic"/>
+                <a:ea typeface="Malgun Gothic"/>
+              </a:rPr>
+              <a:t>Express API</a:t>
+            </a:r>
+          </a:p>
+        </p:txBody>
+      </p:sp>
+      <p:sp>
+        <p:nvSpPr>
+          <p:cNvPr id="7" name="Shape 7"/>
+          <p:cNvSpPr txBox="1"/>
+          <p:nvPr/>
+        </p:nvSpPr>
+        <p:spPr>
+          <a:xfrm>
+            <a:off x="5760720" y="1143000"/>
+            <a:ext cx="2011680" cy="777240"/>
+          </a:xfrm>
+          <a:prstGeom prst="roundRect">
+            <a:avLst/>
+          </a:prstGeom>
+          <a:solidFill>
+            <a:srgbClr val="F3FBFF">
+              <a:alpha val="100000"/>
+            </a:srgbClr>
+          </a:solidFill>
+          <a:ln w="12700">
+            <a:solidFill>
+              <a:srgbClr val="9BD6FF"/>
+            </a:solidFill>
+          </a:ln>
+        </p:spPr>
+        <p:txBody>
+          <a:bodyPr wrap="square" lIns="109728" tIns="73152" rIns="109728" bIns="73152" anchor="mid"/>
+          <a:lstStyle/>
+          <a:p>
+            <a:pPr marL="0" indent="0" algn="l">
+              <a:buNone/>
+            </a:pPr>
+            <a:r>
+              <a:rPr lang="ko-KR" sz="1800" dirty="0">
+                <a:b/>
+                <a:solidFill>
+                  <a:srgbClr val="0F3D66"/>
+                </a:solidFill>
+                <a:latin typeface="Malgun Gothic"/>
+                <a:ea typeface="Malgun Gothic"/>
+              </a:rPr>
+              <a:t>Aiven MySQL</a:t>
+            </a:r>
+          </a:p>
+        </p:txBody>
+      </p:sp>
+      <p:sp>
+        <p:nvSpPr>
+          <p:cNvPr id="8" name="Shape 8"/>
+          <p:cNvSpPr txBox="1"/>
+          <p:nvPr/>
+        </p:nvSpPr>
+        <p:spPr>
+          <a:xfrm>
+            <a:off x="8275320" y="1143000"/>
+            <a:ext cx="2011680" cy="777240"/>
+          </a:xfrm>
+          <a:prstGeom prst="roundRect">
+            <a:avLst/>
+          </a:prstGeom>
+          <a:solidFill>
+            <a:srgbClr val="FFFFFF">
+              <a:alpha val="100000"/>
+            </a:srgbClr>
+          </a:solidFill>
+          <a:ln w="12700">
+            <a:solidFill>
+              <a:srgbClr val="9BD6FF"/>
+            </a:solidFill>
+          </a:ln>
+        </p:spPr>
+        <p:txBody>
+          <a:bodyPr wrap="square" lIns="109728" tIns="73152" rIns="109728" bIns="73152" anchor="mid"/>
+          <a:lstStyle/>
+          <a:p>
+            <a:pPr marL="0" indent="0" algn="l">
+              <a:buNone/>
+            </a:pPr>
+            <a:r>
+              <a:rPr lang="ko-KR" sz="1800" dirty="0">
+                <a:b/>
+                <a:solidFill>
+                  <a:srgbClr val="0F3D66"/>
+                </a:solidFill>
+                <a:latin typeface="Malgun Gothic"/>
+                <a:ea typeface="Malgun Gothic"/>
+              </a:rPr>
+              <a:t>OpenAI API</a:t>
+            </a:r>
+          </a:p>
+        </p:txBody>
+      </p:sp>
+      <p:sp>
+        <p:nvSpPr>
+          <p:cNvPr id="9" name="Shape 9"/>
+          <p:cNvSpPr txBox="1"/>
+          <p:nvPr/>
+        </p:nvSpPr>
+        <p:spPr>
+          <a:xfrm>
+            <a:off x="777240" y="2880360"/>
+            <a:ext cx="5120640" cy="2194560"/>
           </a:xfrm>
           <a:prstGeom prst="rect">
             <a:avLst/>
@@ -2812,14 +3253,14 @@
               <a:buChar char="•"/>
             </a:pPr>
             <a:r>
-              <a:rPr lang="ko-KR" sz="1900" dirty="0">
-                <a:solidFill>
-                  <a:srgbClr val="EAF6FF"/>
-                </a:solidFill>
-                <a:latin typeface="Malgun Gothic"/>
-                <a:ea typeface="Malgun Gothic"/>
-              </a:rPr>
-              <a:t>survey_participants: 사용자 단위 결과 저장</a:t>
+              <a:rPr lang="ko-KR" sz="1800" dirty="0">
+                <a:solidFill>
+                  <a:srgbClr val="17324D"/>
+                </a:solidFill>
+                <a:latin typeface="Malgun Gothic"/>
+                <a:ea typeface="Malgun Gothic"/>
+              </a:rPr>
+              <a:t>쿠키 기반 사용자 식별</a:t>
             </a:r>
           </a:p>
           <a:p>
@@ -2827,14 +3268,14 @@
               <a:buChar char="•"/>
             </a:pPr>
             <a:r>
-              <a:rPr lang="ko-KR" sz="1900" dirty="0">
-                <a:solidFill>
-                  <a:srgbClr val="EAF6FF"/>
-                </a:solidFill>
-                <a:latin typeface="Malgun Gothic"/>
-                <a:ea typeface="Malgun Gothic"/>
-              </a:rPr>
-              <a:t>user_responses: scene_id 기준 응답 저장</a:t>
+              <a:rPr lang="ko-KR" sz="1800" dirty="0">
+                <a:solidFill>
+                  <a:srgbClr val="17324D"/>
+                </a:solidFill>
+                <a:latin typeface="Malgun Gothic"/>
+                <a:ea typeface="Malgun Gothic"/>
+              </a:rPr>
+              <a:t>개인 설문 결과 API</a:t>
             </a:r>
           </a:p>
           <a:p>
@@ -2842,68 +3283,68 @@
               <a:buChar char="•"/>
             </a:pPr>
             <a:r>
-              <a:rPr lang="ko-KR" sz="1900" dirty="0">
-                <a:solidFill>
-                  <a:srgbClr val="EAF6FF"/>
-                </a:solidFill>
-                <a:latin typeface="Malgun Gothic"/>
-                <a:ea typeface="Malgun Gothic"/>
-              </a:rPr>
-              <a:t>scenes_metadata: 질문 라벨과 interaction_type 관리</a:t>
-            </a:r>
-          </a:p>
+              <a:rPr lang="ko-KR" sz="1800" dirty="0">
+                <a:solidFill>
+                  <a:srgbClr val="17324D"/>
+                </a:solidFill>
+                <a:latin typeface="Malgun Gothic"/>
+                <a:ea typeface="Malgun Gothic"/>
+              </a:rPr>
+              <a:t>연령대/성별/문항별 통계 API</a:t>
+            </a:r>
+          </a:p>
+        </p:txBody>
+      </p:sp>
+      <p:sp>
+        <p:nvSpPr>
+          <p:cNvPr id="10" name="Shape 10"/>
+          <p:cNvSpPr txBox="1"/>
+          <p:nvPr/>
+        </p:nvSpPr>
+        <p:spPr>
+          <a:xfrm>
+            <a:off x="6217920" y="2880360"/>
+            <a:ext cx="5120640" cy="2194560"/>
+          </a:xfrm>
+          <a:prstGeom prst="rect">
+            <a:avLst/>
+          </a:prstGeom>
+          <a:noFill/>
+          <a:ln>
+            <a:noFill/>
+          </a:ln>
+        </p:spPr>
+        <p:txBody>
+          <a:bodyPr wrap="square" lIns="45720" tIns="45720" rIns="45720" bIns="45720" anchor="top"/>
+          <a:lstStyle/>
           <a:p>
             <a:pPr marL="228600" indent="-171450" algn="l">
               <a:buChar char="•"/>
             </a:pPr>
             <a:r>
-              <a:rPr lang="ko-KR" sz="1900" dirty="0">
-                <a:solidFill>
-                  <a:srgbClr val="EAF6FF"/>
-                </a:solidFill>
-                <a:latin typeface="Malgun Gothic"/>
-                <a:ea typeface="Malgun Gothic"/>
-              </a:rPr>
-              <a:t>scene_options: 선택형 보기 텍스트 관리</a:t>
-            </a:r>
-          </a:p>
-        </p:txBody>
-      </p:sp>
-      <p:sp>
-        <p:nvSpPr>
-          <p:cNvPr id="6" name="Shape 6"/>
-          <p:cNvSpPr txBox="1"/>
-          <p:nvPr/>
-        </p:nvSpPr>
-        <p:spPr>
-          <a:xfrm>
-            <a:off x="6400800" y="1143000"/>
-            <a:ext cx="4937760" cy="4389120"/>
-          </a:xfrm>
-          <a:prstGeom prst="rect">
-            <a:avLst/>
-          </a:prstGeom>
-          <a:noFill/>
-          <a:ln>
-            <a:noFill/>
-          </a:ln>
-        </p:spPr>
-        <p:txBody>
-          <a:bodyPr wrap="square" lIns="45720" tIns="45720" rIns="45720" bIns="45720" anchor="top"/>
-          <a:lstStyle/>
+              <a:rPr lang="ko-KR" sz="1800" dirty="0">
+                <a:solidFill>
+                  <a:srgbClr val="17324D"/>
+                </a:solidFill>
+                <a:latin typeface="Malgun Gothic"/>
+                <a:ea typeface="Malgun Gothic"/>
+              </a:rPr>
+              <a:t>Trie + RAG 메시지 검열</a:t>
+            </a:r>
+          </a:p>
           <a:p>
             <a:pPr marL="228600" indent="-171450" algn="l">
               <a:buChar char="•"/>
             </a:pPr>
             <a:r>
-              <a:rPr lang="ko-KR" sz="1900" dirty="0">
-                <a:solidFill>
-                  <a:srgbClr val="EAF6FF"/>
-                </a:solidFill>
-                <a:latin typeface="Malgun Gothic"/>
-                <a:ea typeface="Malgun Gothic"/>
-              </a:rPr>
-              <a:t>개인 결과는 participantId 기준으로 조인</a:t>
+              <a:rPr lang="ko-KR" sz="1800" dirty="0">
+                <a:solidFill>
+                  <a:srgbClr val="17324D"/>
+                </a:solidFill>
+                <a:latin typeface="Malgun Gothic"/>
+                <a:ea typeface="Malgun Gothic"/>
+              </a:rPr>
+              <a:t>Step2 3D 심해 인터랙션</a:t>
             </a:r>
           </a:p>
           <a:p>
@@ -2911,33 +3352,84 @@
               <a:buChar char="•"/>
             </a:pPr>
             <a:r>
-              <a:rPr lang="ko-KR" sz="1900" dirty="0">
-                <a:solidFill>
-                  <a:srgbClr val="EAF6FF"/>
-                </a:solidFill>
-                <a:latin typeface="Malgun Gothic"/>
-                <a:ea typeface="Malgun Gothic"/>
-              </a:rPr>
-              <a:t>전체 통계는 age/gender/scene/answer 기준으로 그룹화</a:t>
-            </a:r>
-          </a:p>
-          <a:p>
-            <a:pPr marL="228600" indent="-171450" algn="l">
-              <a:buChar char="•"/>
-            </a:pPr>
-            <a:r>
-              <a:rPr lang="ko-KR" sz="1900" dirty="0">
-                <a:solidFill>
-                  <a:srgbClr val="EAF6FF"/>
-                </a:solidFill>
-                <a:latin typeface="Malgun Gothic"/>
-                <a:ea typeface="Malgun Gothic"/>
-              </a:rPr>
-              <a:t>입력용 장면과 통계 대상 장면을 분리</a:t>
-            </a:r>
-          </a:p>
-        </p:txBody>
-      </p:sp>
+              <a:rPr lang="ko-KR" sz="1800" dirty="0">
+                <a:solidFill>
+                  <a:srgbClr val="17324D"/>
+                </a:solidFill>
+                <a:latin typeface="Malgun Gothic"/>
+                <a:ea typeface="Malgun Gothic"/>
+              </a:rPr>
+              <a:t>Step3 통계/채팅/리포트 모달</a:t>
+            </a:r>
+          </a:p>
+        </p:txBody>
+      </p:sp>
+      <p:cxnSp>
+        <p:nvCxnSpPr>
+          <p:cNvPr id="11" name="Arrow 11"/>
+          <p:cNvCxnSpPr/>
+          <p:nvPr/>
+        </p:nvCxnSpPr>
+        <p:spPr>
+          <a:xfrm>
+            <a:off x="2743200" y="1536192"/>
+            <a:ext cx="502920" cy="0"/>
+          </a:xfrm>
+          <a:prstGeom prst="line">
+            <a:avLst/>
+          </a:prstGeom>
+          <a:ln w="25400">
+            <a:solidFill>
+              <a:srgbClr val="5DAFEA"/>
+            </a:solidFill>
+            <a:tailEnd type="triangle"/>
+          </a:ln>
+        </p:spPr>
+      </p:cxnSp>
+      <p:cxnSp>
+        <p:nvCxnSpPr>
+          <p:cNvPr id="12" name="Arrow 12"/>
+          <p:cNvCxnSpPr/>
+          <p:nvPr/>
+        </p:nvCxnSpPr>
+        <p:spPr>
+          <a:xfrm>
+            <a:off x="5257800" y="1536192"/>
+            <a:ext cx="502920" cy="0"/>
+          </a:xfrm>
+          <a:prstGeom prst="line">
+            <a:avLst/>
+          </a:prstGeom>
+          <a:ln w="25400">
+            <a:solidFill>
+              <a:srgbClr val="5DAFEA"/>
+            </a:solidFill>
+            <a:tailEnd type="triangle"/>
+          </a:ln>
+        </p:spPr>
+      </p:cxnSp>
+      <p:cxnSp>
+        <p:nvCxnSpPr>
+          <p:cNvPr id="13" name="Arrow 13"/>
+          <p:cNvCxnSpPr/>
+          <p:nvPr/>
+        </p:nvCxnSpPr>
+        <p:spPr>
+          <a:xfrm>
+            <a:off x="7772400" y="1536192"/>
+            <a:ext cx="502920" cy="0"/>
+          </a:xfrm>
+          <a:prstGeom prst="line">
+            <a:avLst/>
+          </a:prstGeom>
+          <a:ln w="25400">
+            <a:solidFill>
+              <a:srgbClr val="5DAFEA"/>
+            </a:solidFill>
+            <a:tailEnd type="triangle"/>
+          </a:ln>
+        </p:spPr>
+      </p:cxnSp>
     </p:spTree>
   </p:cSld>
   <p:clrMapOvr>
@@ -2946,13 +3438,13 @@
 </p:sld>
 </file>
 
-<file path=ppt\slides\slide5.xml><?xml version="1.0" encoding="utf-8"?>
+<file path=ppt\slides\slide3.xml><?xml version="1.0" encoding="utf-8"?>
 <p:sld xmlns:a="http://schemas.openxmlformats.org/drawingml/2006/main" xmlns:r="http://schemas.openxmlformats.org/officeDocument/2006/relationships" xmlns:p="http://schemas.openxmlformats.org/presentationml/2006/main">
   <p:cSld>
     <p:bg>
       <p:bgPr>
         <a:solidFill>
-          <a:srgbClr val="13263A"/>
+          <a:srgbClr val="F7FBFF"/>
         </a:solidFill>
         <a:effectLst/>
       </p:bgPr>
@@ -2986,7 +3478,7 @@
             <a:avLst/>
           </a:prstGeom>
           <a:solidFill>
-            <a:srgbClr val="13263A">
+            <a:srgbClr val="F7FBFF">
               <a:alpha val="100000"/>
             </a:srgbClr>
           </a:solidFill>
@@ -3026,89 +3518,6 @@
             <a:ext cx="146304" cy="6858000"/>
           </a:xfrm>
           <a:prstGeom prst="rect">
-            <a:avLst/>
-          </a:prstGeom>
-          <a:solidFill>
-            <a:srgbClr val="60D394">
-              <a:alpha val="100000"/>
-            </a:srgbClr>
-          </a:solidFill>
-          <a:ln>
-            <a:noFill/>
-          </a:ln>
-        </p:spPr>
-        <p:txBody>
-          <a:bodyPr wrap="square" lIns="109728" tIns="73152" rIns="109728" bIns="73152" anchor="mid"/>
-          <a:lstStyle/>
-          <a:p>
-            <a:pPr marL="0" indent="0" algn="l">
-              <a:buNone/>
-            </a:pPr>
-            <a:r>
-              <a:rPr lang="ko-KR" sz="2200" dirty="0">
-                <a:solidFill>
-                  <a:srgbClr val="111111"/>
-                </a:solidFill>
-                <a:latin typeface="Malgun Gothic"/>
-                <a:ea typeface="Malgun Gothic"/>
-              </a:rPr>
-              <a:t/>
-            </a:r>
-          </a:p>
-        </p:txBody>
-      </p:sp>
-      <p:sp>
-        <p:nvSpPr>
-          <p:cNvPr id="4" name="Shape 4"/>
-          <p:cNvSpPr txBox="1"/>
-          <p:nvPr/>
-        </p:nvSpPr>
-        <p:spPr>
-          <a:xfrm>
-            <a:off x="594360" y="347472"/>
-            <a:ext cx="10972800" cy="566928"/>
-          </a:xfrm>
-          <a:prstGeom prst="rect">
-            <a:avLst/>
-          </a:prstGeom>
-          <a:noFill/>
-          <a:ln>
-            <a:noFill/>
-          </a:ln>
-        </p:spPr>
-        <p:txBody>
-          <a:bodyPr wrap="square" lIns="0" tIns="0" rIns="0" bIns="0" anchor="top"/>
-          <a:lstStyle/>
-          <a:p>
-            <a:pPr marL="0" indent="0" algn="l">
-              <a:buNone/>
-            </a:pPr>
-            <a:r>
-              <a:rPr lang="ko-KR" sz="2700" dirty="0">
-                <a:b/>
-                <a:solidFill>
-                  <a:srgbClr val="FFFFFF"/>
-                </a:solidFill>
-                <a:latin typeface="Malgun Gothic"/>
-                <a:ea typeface="Malgun Gothic"/>
-              </a:rPr>
-              <a:t>개인 설문 결과 API 설계</a:t>
-            </a:r>
-          </a:p>
-        </p:txBody>
-      </p:sp>
-      <p:sp>
-        <p:nvSpPr>
-          <p:cNvPr id="5" name="Shape 5"/>
-          <p:cNvSpPr txBox="1"/>
-          <p:nvPr/>
-        </p:nvSpPr>
-        <p:spPr>
-          <a:xfrm>
-            <a:off x="777240" y="1143000"/>
-            <a:ext cx="2743200" cy="777240"/>
-          </a:xfrm>
-          <a:prstGeom prst="roundRect">
             <a:avLst/>
           </a:prstGeom>
           <a:solidFill>
@@ -3128,15 +3537,123 @@
               <a:buNone/>
             </a:pPr>
             <a:r>
+              <a:rPr lang="ko-KR" sz="2200" dirty="0">
+                <a:solidFill>
+                  <a:srgbClr val="111111"/>
+                </a:solidFill>
+                <a:latin typeface="Malgun Gothic"/>
+                <a:ea typeface="Malgun Gothic"/>
+              </a:rPr>
+              <a:t/>
+            </a:r>
+          </a:p>
+        </p:txBody>
+      </p:sp>
+      <p:sp>
+        <p:nvSpPr>
+          <p:cNvPr id="4" name="Shape 4"/>
+          <p:cNvSpPr txBox="1"/>
+          <p:nvPr/>
+        </p:nvSpPr>
+        <p:spPr>
+          <a:xfrm>
+            <a:off x="594360" y="347472"/>
+            <a:ext cx="10972800" cy="566928"/>
+          </a:xfrm>
+          <a:prstGeom prst="rect">
+            <a:avLst/>
+          </a:prstGeom>
+          <a:noFill/>
+          <a:ln>
+            <a:noFill/>
+          </a:ln>
+        </p:spPr>
+        <p:txBody>
+          <a:bodyPr wrap="square" lIns="0" tIns="0" rIns="0" bIns="0" anchor="top"/>
+          <a:lstStyle/>
+          <a:p>
+            <a:pPr marL="0" indent="0" algn="l">
+              <a:buNone/>
+            </a:pPr>
+            <a:r>
+              <a:rPr lang="ko-KR" sz="2700" dirty="0">
+                <a:b/>
+                <a:solidFill>
+                  <a:srgbClr val="0F3D66"/>
+                </a:solidFill>
+                <a:latin typeface="Malgun Gothic"/>
+                <a:ea typeface="Malgun Gothic"/>
+              </a:rPr>
+              <a:t>DB Connection</a:t>
+            </a:r>
+          </a:p>
+        </p:txBody>
+      </p:sp>
+      <p:sp>
+        <p:nvSpPr>
+          <p:cNvPr id="5" name="Shape 5"/>
+          <p:cNvSpPr txBox="1"/>
+          <p:nvPr/>
+        </p:nvSpPr>
+        <p:spPr>
+          <a:xfrm>
+            <a:off x="731520" y="1097280"/>
+            <a:ext cx="4389120" cy="2286000"/>
+          </a:xfrm>
+          <a:prstGeom prst="rect">
+            <a:avLst/>
+          </a:prstGeom>
+          <a:noFill/>
+          <a:ln>
+            <a:noFill/>
+          </a:ln>
+        </p:spPr>
+        <p:txBody>
+          <a:bodyPr wrap="square" lIns="45720" tIns="45720" rIns="45720" bIns="45720" anchor="top"/>
+          <a:lstStyle/>
+          <a:p>
+            <a:pPr marL="228600" indent="-171450" algn="l">
+              <a:buChar char="•"/>
+            </a:pPr>
+            <a:r>
               <a:rPr lang="ko-KR" sz="1800" dirty="0">
-                <a:b/>
-                <a:solidFill>
-                  <a:srgbClr val="101820"/>
-                </a:solidFill>
-                <a:latin typeface="Malgun Gothic"/>
-                <a:ea typeface="Malgun Gothic"/>
-              </a:rPr>
-              <a:t>Cookie id</a:t>
+                <a:solidFill>
+                  <a:srgbClr val="17324D"/>
+                </a:solidFill>
+                <a:latin typeface="Malgun Gothic"/>
+                <a:ea typeface="Malgun Gothic"/>
+              </a:rPr>
+              <a:t>Aiven MySQL 연결 정보는 .env를 우선 사용</a:t>
+            </a:r>
+          </a:p>
+          <a:p>
+            <a:pPr marL="228600" indent="-171450" algn="l">
+              <a:buChar char="•"/>
+            </a:pPr>
+            <a:r>
+              <a:rPr lang="ko-KR" sz="1800" dirty="0">
+                <a:solidFill>
+                  <a:srgbClr val="17324D"/>
+                </a:solidFill>
+                <a:latin typeface="Malgun Gothic"/>
+                <a:ea typeface="Malgun Gothic"/>
+              </a:rPr>
+              <a:t>mysql2/promise 기반 커넥션 풀 생성</a:t>
+            </a:r>
+          </a:p>
+          <a:p>
+            <a:pPr marL="228600" indent="-171450" algn="l">
+              <a:buChar char="•"/>
+            </a:pPr>
+            <a:r>
+              <a:rPr lang="ko-KR" sz="1800" dirty="0">
+                <a:solidFill>
+                  <a:srgbClr val="17324D"/>
+                </a:solidFill>
+                <a:latin typeface="Malgun Gothic"/>
+                <a:ea typeface="Malgun Gothic"/>
+              </a:rPr>
+              <a:t>모든 repository에서 dbPool을 공유</a:t>
             </a:r>
           </a:p>
         </p:txBody>
@@ -3149,19 +3666,21 @@
         </p:nvSpPr>
         <p:spPr>
           <a:xfrm>
-            <a:off x="3794760" y="1143000"/>
-            <a:ext cx="2743200" cy="777240"/>
+            <a:off x="777240" y="4160520"/>
+            <a:ext cx="4297680" cy="822960"/>
           </a:xfrm>
           <a:prstGeom prst="roundRect">
             <a:avLst/>
           </a:prstGeom>
           <a:solidFill>
-            <a:srgbClr val="60D394">
+            <a:srgbClr val="DDF1FF">
               <a:alpha val="100000"/>
             </a:srgbClr>
           </a:solidFill>
-          <a:ln>
-            <a:noFill/>
+          <a:ln w="12700">
+            <a:solidFill>
+              <a:srgbClr val="9BD6FF"/>
+            </a:solidFill>
           </a:ln>
         </p:spPr>
         <p:txBody>
@@ -3172,176 +3691,47 @@
               <a:buNone/>
             </a:pPr>
             <a:r>
-              <a:rPr lang="ko-KR" sz="1800" dirty="0">
-                <a:b/>
-                <a:solidFill>
-                  <a:srgbClr val="101820"/>
-                </a:solidFill>
-                <a:latin typeface="Malgun Gothic"/>
-                <a:ea typeface="Malgun Gothic"/>
-              </a:rPr>
-              <a:t>Participant</a:t>
-            </a:r>
-          </a:p>
-        </p:txBody>
-      </p:sp>
-      <p:sp>
-        <p:nvSpPr>
-          <p:cNvPr id="7" name="Shape 7"/>
-          <p:cNvSpPr txBox="1"/>
-          <p:nvPr/>
-        </p:nvSpPr>
-        <p:spPr>
-          <a:xfrm>
-            <a:off x="6812280" y="1143000"/>
-            <a:ext cx="2743200" cy="777240"/>
-          </a:xfrm>
-          <a:prstGeom prst="roundRect">
-            <a:avLst/>
-          </a:prstGeom>
-          <a:solidFill>
-            <a:srgbClr val="FFD166">
-              <a:alpha val="100000"/>
-            </a:srgbClr>
-          </a:solidFill>
-          <a:ln>
-            <a:noFill/>
-          </a:ln>
-        </p:spPr>
-        <p:txBody>
-          <a:bodyPr wrap="square" lIns="109728" tIns="73152" rIns="109728" bIns="73152" anchor="mid"/>
-          <a:lstStyle/>
-          <a:p>
-            <a:pPr marL="0" indent="0" algn="l">
-              <a:buNone/>
-            </a:pPr>
-            <a:r>
-              <a:rPr lang="ko-KR" sz="1800" dirty="0">
-                <a:b/>
-                <a:solidFill>
-                  <a:srgbClr val="101820"/>
-                </a:solidFill>
-                <a:latin typeface="Malgun Gothic"/>
-                <a:ea typeface="Malgun Gothic"/>
-              </a:rPr>
-              <a:t>Answers</a:t>
-            </a:r>
-          </a:p>
-        </p:txBody>
-      </p:sp>
-      <p:sp>
-        <p:nvSpPr>
-          <p:cNvPr id="8" name="Shape 8"/>
-          <p:cNvSpPr txBox="1"/>
-          <p:nvPr/>
-        </p:nvSpPr>
-        <p:spPr>
-          <a:xfrm>
-            <a:off x="868680" y="2743200"/>
-            <a:ext cx="10058400" cy="2377440"/>
-          </a:xfrm>
-          <a:prstGeom prst="rect">
-            <a:avLst/>
-          </a:prstGeom>
-          <a:noFill/>
-          <a:ln>
-            <a:noFill/>
-          </a:ln>
-        </p:spPr>
-        <p:txBody>
-          <a:bodyPr wrap="square" lIns="45720" tIns="45720" rIns="45720" bIns="45720" anchor="top"/>
-          <a:lstStyle/>
-          <a:p>
-            <a:pPr marL="228600" indent="-171450" algn="l">
-              <a:buChar char="•"/>
-            </a:pPr>
-            <a:r>
-              <a:rPr lang="ko-KR" sz="1900" dirty="0">
-                <a:solidFill>
-                  <a:srgbClr val="EAF6FF"/>
-                </a:solidFill>
-                <a:latin typeface="Malgun Gothic"/>
-                <a:ea typeface="Malgun Gothic"/>
-              </a:rPr>
-              <a:t>현재 사용자 한 명의 질문/답변만 조회</a:t>
-            </a:r>
-          </a:p>
-          <a:p>
-            <a:pPr marL="228600" indent="-171450" algn="l">
-              <a:buChar char="•"/>
-            </a:pPr>
-            <a:r>
-              <a:rPr lang="ko-KR" sz="1900" dirty="0">
-                <a:solidFill>
-                  <a:srgbClr val="EAF6FF"/>
-                </a:solidFill>
-                <a:latin typeface="Malgun Gothic"/>
-                <a:ea typeface="Malgun Gothic"/>
-              </a:rPr>
-              <a:t>choice는 option_text, input은 answer_text로 응답값 반환</a:t>
-            </a:r>
-          </a:p>
-          <a:p>
-            <a:pPr marL="228600" indent="-171450" algn="l">
-              <a:buChar char="•"/>
-            </a:pPr>
-            <a:r>
-              <a:rPr lang="ko-KR" sz="1900" dirty="0">
-                <a:solidFill>
-                  <a:srgbClr val="EAF6FF"/>
-                </a:solidFill>
-                <a:latin typeface="Malgun Gothic"/>
-                <a:ea typeface="Malgun Gothic"/>
-              </a:rPr>
-              <a:t>total_score와 result_analysis를 상단 리포트 데이터로 함께 제공</a:t>
-            </a:r>
-          </a:p>
-        </p:txBody>
-      </p:sp>
-      <p:cxnSp>
-        <p:nvCxnSpPr>
-          <p:cNvPr id="9" name="Arrow 9"/>
-          <p:cNvCxnSpPr/>
-          <p:nvPr/>
-        </p:nvCxnSpPr>
-        <p:spPr>
-          <a:xfrm>
-            <a:off x="3520440" y="1527048"/>
-            <a:ext cx="274320" cy="0"/>
-          </a:xfrm>
-          <a:prstGeom prst="line">
-            <a:avLst/>
-          </a:prstGeom>
-          <a:ln w="25400">
+              <a:rPr lang="ko-KR" sz="1500" dirty="0">
+                <a:solidFill>
+                  <a:srgbClr val="0F3D66"/>
+                </a:solidFill>
+                <a:latin typeface="Malgun Gothic"/>
+                <a:ea typeface="Malgun Gothic"/>
+              </a:rPr>
+              <a:t>캡처 코드: 01_db_connection_pool.png</a:t>
+            </a:r>
+          </a:p>
+        </p:txBody>
+      </p:sp>
+      <p:pic>
+        <p:nvPicPr>
+          <p:cNvPr id="7" name="Picture 7"/>
+          <p:cNvPicPr>
+            <a:picLocks noChangeAspect="1"/>
+          </p:cNvPicPr>
+          <p:nvPr/>
+        </p:nvPicPr>
+        <p:blipFill>
+          <a:blip r:embed="rId2"/>
+          <a:stretch>
+            <a:fillRect/>
+          </a:stretch>
+        </p:blipFill>
+        <p:spPr>
+          <a:xfrm>
+            <a:off x="5486400" y="1005840"/>
+            <a:ext cx="5943600" cy="5029200"/>
+          </a:xfrm>
+          <a:prstGeom prst="rect">
+            <a:avLst/>
+          </a:prstGeom>
+          <a:ln w="12700">
             <a:solidFill>
-              <a:srgbClr val="EAF6FF"/>
+              <a:srgbClr val="C7E6FF"/>
             </a:solidFill>
-            <a:tailEnd type="triangle"/>
-          </a:ln>
-        </p:spPr>
-      </p:cxnSp>
-      <p:cxnSp>
-        <p:nvCxnSpPr>
-          <p:cNvPr id="10" name="Arrow 10"/>
-          <p:cNvCxnSpPr/>
-          <p:nvPr/>
-        </p:nvCxnSpPr>
-        <p:spPr>
-          <a:xfrm>
-            <a:off x="6537960" y="1527048"/>
-            <a:ext cx="274320" cy="0"/>
-          </a:xfrm>
-          <a:prstGeom prst="line">
-            <a:avLst/>
-          </a:prstGeom>
-          <a:ln w="25400">
-            <a:solidFill>
-              <a:srgbClr val="EAF6FF"/>
-            </a:solidFill>
-            <a:tailEnd type="triangle"/>
-          </a:ln>
-        </p:spPr>
-      </p:cxnSp>
+          </a:ln>
+        </p:spPr>
+      </p:pic>
     </p:spTree>
   </p:cSld>
   <p:clrMapOvr>
@@ -3350,13 +3740,13 @@
 </p:sld>
 </file>
 
-<file path=ppt\slides\slide6.xml><?xml version="1.0" encoding="utf-8"?>
+<file path=ppt\slides\slide4.xml><?xml version="1.0" encoding="utf-8"?>
 <p:sld xmlns:a="http://schemas.openxmlformats.org/drawingml/2006/main" xmlns:r="http://schemas.openxmlformats.org/officeDocument/2006/relationships" xmlns:p="http://schemas.openxmlformats.org/presentationml/2006/main">
   <p:cSld>
     <p:bg>
       <p:bgPr>
         <a:solidFill>
-          <a:srgbClr val="101820"/>
+          <a:srgbClr val="F7FBFF"/>
         </a:solidFill>
         <a:effectLst/>
       </p:bgPr>
@@ -3390,7 +3780,7 @@
             <a:avLst/>
           </a:prstGeom>
           <a:solidFill>
-            <a:srgbClr val="101820">
+            <a:srgbClr val="F7FBFF">
               <a:alpha val="100000"/>
             </a:srgbClr>
           </a:solidFill>
@@ -3491,12 +3881,12 @@
               <a:rPr lang="ko-KR" sz="2700" dirty="0">
                 <a:b/>
                 <a:solidFill>
-                  <a:srgbClr val="FFFFFF"/>
-                </a:solidFill>
-                <a:latin typeface="Malgun Gothic"/>
-                <a:ea typeface="Malgun Gothic"/>
-              </a:rPr>
-              <a:t>통계 API와 데이터 가공</a:t>
+                  <a:srgbClr val="0F3D66"/>
+                </a:solidFill>
+                <a:latin typeface="Malgun Gothic"/>
+                <a:ea typeface="Malgun Gothic"/>
+              </a:rPr>
+              <a:t>Personal Survey Result API</a:t>
             </a:r>
           </a:p>
         </p:txBody>
@@ -3509,8 +3899,8 @@
         </p:nvSpPr>
         <p:spPr>
           <a:xfrm>
-            <a:off x="777240" y="1097280"/>
-            <a:ext cx="10241280" cy="4206240"/>
+            <a:off x="685800" y="1051560"/>
+            <a:ext cx="3657600" cy="2468880"/>
           </a:xfrm>
           <a:prstGeom prst="rect">
             <a:avLst/>
@@ -3528,14 +3918,14 @@
               <a:buChar char="•"/>
             </a:pPr>
             <a:r>
-              <a:rPr lang="ko-KR" sz="2000" dirty="0">
-                <a:solidFill>
-                  <a:srgbClr val="EAF6FF"/>
-                </a:solidFill>
-                <a:latin typeface="Malgun Gothic"/>
-                <a:ea typeface="Malgun Gothic"/>
-              </a:rPr>
-              <a:t>SQL: 연령대/성별/장면/답변 단위 집계</a:t>
+              <a:rPr lang="ko-KR" sz="1700" dirty="0">
+                <a:solidFill>
+                  <a:srgbClr val="17324D"/>
+                </a:solidFill>
+                <a:latin typeface="Malgun Gothic"/>
+                <a:ea typeface="Malgun Gothic"/>
+              </a:rPr>
+              <a:t>쿠키 id로 현재 참여자 식별</a:t>
             </a:r>
           </a:p>
           <a:p>
@@ -3543,14 +3933,14 @@
               <a:buChar char="•"/>
             </a:pPr>
             <a:r>
-              <a:rPr lang="ko-KR" sz="2000" dirty="0">
-                <a:solidFill>
-                  <a:srgbClr val="EAF6FF"/>
-                </a:solidFill>
-                <a:latin typeface="Malgun Gothic"/>
-                <a:ea typeface="Malgun Gothic"/>
-              </a:rPr>
-              <a:t>Service: graph.nodes, graph.links, summary.questions 구조로 재가공</a:t>
+              <a:rPr lang="ko-KR" sz="1700" dirty="0">
+                <a:solidFill>
+                  <a:srgbClr val="17324D"/>
+                </a:solidFill>
+                <a:latin typeface="Malgun Gothic"/>
+                <a:ea typeface="Malgun Gothic"/>
+              </a:rPr>
+              <a:t>scene/response/option/participant 조인</a:t>
             </a:r>
           </a:p>
           <a:p>
@@ -3558,33 +3948,121 @@
               <a:buChar char="•"/>
             </a:pPr>
             <a:r>
-              <a:rPr lang="ko-KR" sz="2000" dirty="0">
-                <a:solidFill>
-                  <a:srgbClr val="EAF6FF"/>
-                </a:solidFill>
-                <a:latin typeface="Malgun Gothic"/>
-                <a:ea typeface="Malgun Gothic"/>
-              </a:rPr>
-              <a:t>percentage: 질문 전체 응답 수 대비 선택 수로 계산</a:t>
-            </a:r>
-          </a:p>
-          <a:p>
-            <a:pPr marL="228600" indent="-171450" algn="l">
-              <a:buChar char="•"/>
-            </a:pPr>
-            <a:r>
-              <a:rPr lang="ko-KR" sz="2000" dirty="0">
-                <a:solidFill>
-                  <a:srgbClr val="EAF6FF"/>
-                </a:solidFill>
-                <a:latin typeface="Malgun Gothic"/>
-                <a:ea typeface="Malgun Gothic"/>
-              </a:rPr>
-              <a:t>프론트: 같은 응답으로 입자 시각화와 원그래프를 동시에 구성</a:t>
-            </a:r>
-          </a:p>
-        </p:txBody>
-      </p:sp>
+              <a:rPr lang="ko-KR" sz="1700" dirty="0">
+                <a:solidFill>
+                  <a:srgbClr val="17324D"/>
+                </a:solidFill>
+                <a:latin typeface="Malgun Gothic"/>
+                <a:ea typeface="Malgun Gothic"/>
+              </a:rPr>
+              <a:t>총점과 AI 분석 결과를 함께 반환</a:t>
+            </a:r>
+          </a:p>
+        </p:txBody>
+      </p:sp>
+      <p:sp>
+        <p:nvSpPr>
+          <p:cNvPr id="6" name="Shape 6"/>
+          <p:cNvSpPr txBox="1"/>
+          <p:nvPr/>
+        </p:nvSpPr>
+        <p:spPr>
+          <a:xfrm>
+            <a:off x="713232" y="3931920"/>
+            <a:ext cx="3566160" cy="594360"/>
+          </a:xfrm>
+          <a:prstGeom prst="roundRect">
+            <a:avLst/>
+          </a:prstGeom>
+          <a:solidFill>
+            <a:srgbClr val="DDF1FF">
+              <a:alpha val="100000"/>
+            </a:srgbClr>
+          </a:solidFill>
+          <a:ln w="12700">
+            <a:solidFill>
+              <a:srgbClr val="9BD6FF"/>
+            </a:solidFill>
+          </a:ln>
+        </p:spPr>
+        <p:txBody>
+          <a:bodyPr wrap="square" lIns="109728" tIns="73152" rIns="109728" bIns="73152" anchor="mid"/>
+          <a:lstStyle/>
+          <a:p>
+            <a:pPr marL="0" indent="0" algn="l">
+              <a:buNone/>
+            </a:pPr>
+            <a:r>
+              <a:rPr lang="ko-KR" sz="1400" dirty="0">
+                <a:solidFill>
+                  <a:srgbClr val="0F3D66"/>
+                </a:solidFill>
+                <a:latin typeface="Malgun Gothic"/>
+                <a:ea typeface="Malgun Gothic"/>
+              </a:rPr>
+              <a:t>02_personal_survey_join.png</a:t>
+            </a:r>
+          </a:p>
+        </p:txBody>
+      </p:sp>
+      <p:pic>
+        <p:nvPicPr>
+          <p:cNvPr id="7" name="Picture 7"/>
+          <p:cNvPicPr>
+            <a:picLocks noChangeAspect="1"/>
+          </p:cNvPicPr>
+          <p:nvPr/>
+        </p:nvPicPr>
+        <p:blipFill>
+          <a:blip r:embed="rId2"/>
+          <a:stretch>
+            <a:fillRect/>
+          </a:stretch>
+        </p:blipFill>
+        <p:spPr>
+          <a:xfrm>
+            <a:off x="4480560" y="987552"/>
+            <a:ext cx="2331720" cy="5074920"/>
+          </a:xfrm>
+          <a:prstGeom prst="rect">
+            <a:avLst/>
+          </a:prstGeom>
+          <a:ln w="12700">
+            <a:solidFill>
+              <a:srgbClr val="C7E6FF"/>
+            </a:solidFill>
+          </a:ln>
+        </p:spPr>
+      </p:pic>
+      <p:pic>
+        <p:nvPicPr>
+          <p:cNvPr id="8" name="Picture 8"/>
+          <p:cNvPicPr>
+            <a:picLocks noChangeAspect="1"/>
+          </p:cNvPicPr>
+          <p:nvPr/>
+        </p:nvPicPr>
+        <p:blipFill>
+          <a:blip r:embed="rId3"/>
+          <a:stretch>
+            <a:fillRect/>
+          </a:stretch>
+        </p:blipFill>
+        <p:spPr>
+          <a:xfrm>
+            <a:off x="7086600" y="1005840"/>
+            <a:ext cx="4434840" cy="5029200"/>
+          </a:xfrm>
+          <a:prstGeom prst="rect">
+            <a:avLst/>
+          </a:prstGeom>
+          <a:ln w="12700">
+            <a:solidFill>
+              <a:srgbClr val="C7E6FF"/>
+            </a:solidFill>
+          </a:ln>
+        </p:spPr>
+      </p:pic>
     </p:spTree>
   </p:cSld>
   <p:clrMapOvr>
@@ -3593,13 +4071,13 @@
 </p:sld>
 </file>
 
-<file path=ppt\slides\slide7.xml><?xml version="1.0" encoding="utf-8"?>
+<file path=ppt\slides\slide5.xml><?xml version="1.0" encoding="utf-8"?>
 <p:sld xmlns:a="http://schemas.openxmlformats.org/drawingml/2006/main" xmlns:r="http://schemas.openxmlformats.org/officeDocument/2006/relationships" xmlns:p="http://schemas.openxmlformats.org/presentationml/2006/main">
   <p:cSld>
     <p:bg>
       <p:bgPr>
         <a:solidFill>
-          <a:srgbClr val="13263A"/>
+          <a:srgbClr val="F7FBFF"/>
         </a:solidFill>
         <a:effectLst/>
       </p:bgPr>
@@ -3633,7 +4111,7 @@
             <a:avLst/>
           </a:prstGeom>
           <a:solidFill>
-            <a:srgbClr val="13263A">
+            <a:srgbClr val="F7FBFF">
               <a:alpha val="100000"/>
             </a:srgbClr>
           </a:solidFill>
@@ -3673,205 +4151,6 @@
             <a:ext cx="146304" cy="6858000"/>
           </a:xfrm>
           <a:prstGeom prst="rect">
-            <a:avLst/>
-          </a:prstGeom>
-          <a:solidFill>
-            <a:srgbClr val="EF476F">
-              <a:alpha val="100000"/>
-            </a:srgbClr>
-          </a:solidFill>
-          <a:ln>
-            <a:noFill/>
-          </a:ln>
-        </p:spPr>
-        <p:txBody>
-          <a:bodyPr wrap="square" lIns="109728" tIns="73152" rIns="109728" bIns="73152" anchor="mid"/>
-          <a:lstStyle/>
-          <a:p>
-            <a:pPr marL="0" indent="0" algn="l">
-              <a:buNone/>
-            </a:pPr>
-            <a:r>
-              <a:rPr lang="ko-KR" sz="2200" dirty="0">
-                <a:solidFill>
-                  <a:srgbClr val="111111"/>
-                </a:solidFill>
-                <a:latin typeface="Malgun Gothic"/>
-                <a:ea typeface="Malgun Gothic"/>
-              </a:rPr>
-              <a:t/>
-            </a:r>
-          </a:p>
-        </p:txBody>
-      </p:sp>
-      <p:sp>
-        <p:nvSpPr>
-          <p:cNvPr id="4" name="Shape 4"/>
-          <p:cNvSpPr txBox="1"/>
-          <p:nvPr/>
-        </p:nvSpPr>
-        <p:spPr>
-          <a:xfrm>
-            <a:off x="594360" y="347472"/>
-            <a:ext cx="10972800" cy="566928"/>
-          </a:xfrm>
-          <a:prstGeom prst="rect">
-            <a:avLst/>
-          </a:prstGeom>
-          <a:noFill/>
-          <a:ln>
-            <a:noFill/>
-          </a:ln>
-        </p:spPr>
-        <p:txBody>
-          <a:bodyPr wrap="square" lIns="0" tIns="0" rIns="0" bIns="0" anchor="top"/>
-          <a:lstStyle/>
-          <a:p>
-            <a:pPr marL="0" indent="0" algn="l">
-              <a:buNone/>
-            </a:pPr>
-            <a:r>
-              <a:rPr lang="ko-KR" sz="2700" dirty="0">
-                <a:b/>
-                <a:solidFill>
-                  <a:srgbClr val="FFFFFF"/>
-                </a:solidFill>
-                <a:latin typeface="Malgun Gothic"/>
-                <a:ea typeface="Malgun Gothic"/>
-              </a:rPr>
-              <a:t>RAG 하이브리드 검열</a:t>
-            </a:r>
-          </a:p>
-        </p:txBody>
-      </p:sp>
-      <p:sp>
-        <p:nvSpPr>
-          <p:cNvPr id="5" name="Shape 5"/>
-          <p:cNvSpPr txBox="1"/>
-          <p:nvPr/>
-        </p:nvSpPr>
-        <p:spPr>
-          <a:xfrm>
-            <a:off x="731520" y="1143000"/>
-            <a:ext cx="2743200" cy="1097280"/>
-          </a:xfrm>
-          <a:prstGeom prst="roundRect">
-            <a:avLst/>
-          </a:prstGeom>
-          <a:solidFill>
-            <a:srgbClr val="FFD166">
-              <a:alpha val="100000"/>
-            </a:srgbClr>
-          </a:solidFill>
-          <a:ln>
-            <a:noFill/>
-          </a:ln>
-        </p:spPr>
-        <p:txBody>
-          <a:bodyPr wrap="square" lIns="109728" tIns="73152" rIns="109728" bIns="73152" anchor="mid"/>
-          <a:lstStyle/>
-          <a:p>
-            <a:pPr marL="0" indent="0" algn="l">
-              <a:buNone/>
-            </a:pPr>
-            <a:r>
-              <a:rPr lang="ko-KR" sz="2000" dirty="0">
-                <a:solidFill>
-                  <a:srgbClr val="101820"/>
-                </a:solidFill>
-                <a:latin typeface="Malgun Gothic"/>
-                <a:ea typeface="Malgun Gothic"/>
-              </a:rPr>
-              <a:t>1차</a:t>
-            </a:r>
-          </a:p>
-          <a:p>
-            <a:pPr marL="0" indent="0" algn="l">
-              <a:buNone/>
-            </a:pPr>
-            <a:r>
-              <a:rPr lang="ko-KR" sz="2000" dirty="0">
-                <a:solidFill>
-                  <a:srgbClr val="101820"/>
-                </a:solidFill>
-                <a:latin typeface="Malgun Gothic"/>
-                <a:ea typeface="Malgun Gothic"/>
-              </a:rPr>
-              <a:t>Trie 리스트 필터</a:t>
-            </a:r>
-          </a:p>
-        </p:txBody>
-      </p:sp>
-      <p:sp>
-        <p:nvSpPr>
-          <p:cNvPr id="6" name="Shape 6"/>
-          <p:cNvSpPr txBox="1"/>
-          <p:nvPr/>
-        </p:nvSpPr>
-        <p:spPr>
-          <a:xfrm>
-            <a:off x="4663440" y="1143000"/>
-            <a:ext cx="2743200" cy="1097280"/>
-          </a:xfrm>
-          <a:prstGeom prst="roundRect">
-            <a:avLst/>
-          </a:prstGeom>
-          <a:solidFill>
-            <a:srgbClr val="60D394">
-              <a:alpha val="100000"/>
-            </a:srgbClr>
-          </a:solidFill>
-          <a:ln>
-            <a:noFill/>
-          </a:ln>
-        </p:spPr>
-        <p:txBody>
-          <a:bodyPr wrap="square" lIns="109728" tIns="73152" rIns="109728" bIns="73152" anchor="mid"/>
-          <a:lstStyle/>
-          <a:p>
-            <a:pPr marL="0" indent="0" algn="l">
-              <a:buNone/>
-            </a:pPr>
-            <a:r>
-              <a:rPr lang="ko-KR" sz="2000" dirty="0">
-                <a:solidFill>
-                  <a:srgbClr val="101820"/>
-                </a:solidFill>
-                <a:latin typeface="Malgun Gothic"/>
-                <a:ea typeface="Malgun Gothic"/>
-              </a:rPr>
-              <a:t>2차</a:t>
-            </a:r>
-          </a:p>
-          <a:p>
-            <a:pPr marL="0" indent="0" algn="l">
-              <a:buNone/>
-            </a:pPr>
-            <a:r>
-              <a:rPr lang="ko-KR" sz="2000" dirty="0">
-                <a:solidFill>
-                  <a:srgbClr val="101820"/>
-                </a:solidFill>
-                <a:latin typeface="Malgun Gothic"/>
-                <a:ea typeface="Malgun Gothic"/>
-              </a:rPr>
-              <a:t>GPT-4o mini RAG</a:t>
-            </a:r>
-          </a:p>
-        </p:txBody>
-      </p:sp>
-      <p:sp>
-        <p:nvSpPr>
-          <p:cNvPr id="7" name="Shape 7"/>
-          <p:cNvSpPr txBox="1"/>
-          <p:nvPr/>
-        </p:nvSpPr>
-        <p:spPr>
-          <a:xfrm>
-            <a:off x="8595360" y="1143000"/>
-            <a:ext cx="2743200" cy="1097280"/>
-          </a:xfrm>
-          <a:prstGeom prst="roundRect">
             <a:avLst/>
           </a:prstGeom>
           <a:solidFill>
@@ -3891,43 +4170,68 @@
               <a:buNone/>
             </a:pPr>
             <a:r>
-              <a:rPr lang="ko-KR" sz="2000" dirty="0">
-                <a:solidFill>
-                  <a:srgbClr val="101820"/>
-                </a:solidFill>
-                <a:latin typeface="Malgun Gothic"/>
-                <a:ea typeface="Malgun Gothic"/>
-              </a:rPr>
-              <a:t>최종</a:t>
-            </a:r>
-          </a:p>
-          <a:p>
-            <a:pPr marL="0" indent="0" algn="l">
-              <a:buNone/>
-            </a:pPr>
-            <a:r>
-              <a:rPr lang="ko-KR" sz="2000" dirty="0">
-                <a:solidFill>
-                  <a:srgbClr val="101820"/>
-                </a:solidFill>
-                <a:latin typeface="Malgun Gothic"/>
-                <a:ea typeface="Malgun Gothic"/>
-              </a:rPr>
-              <a:t>DB 상태 반영</a:t>
-            </a:r>
-          </a:p>
-        </p:txBody>
-      </p:sp>
-      <p:sp>
-        <p:nvSpPr>
-          <p:cNvPr id="8" name="Shape 8"/>
-          <p:cNvSpPr txBox="1"/>
-          <p:nvPr/>
-        </p:nvSpPr>
-        <p:spPr>
-          <a:xfrm>
-            <a:off x="822960" y="3154680"/>
-            <a:ext cx="10149840" cy="2194560"/>
+              <a:rPr lang="ko-KR" sz="2200" dirty="0">
+                <a:solidFill>
+                  <a:srgbClr val="111111"/>
+                </a:solidFill>
+                <a:latin typeface="Malgun Gothic"/>
+                <a:ea typeface="Malgun Gothic"/>
+              </a:rPr>
+              <a:t/>
+            </a:r>
+          </a:p>
+        </p:txBody>
+      </p:sp>
+      <p:sp>
+        <p:nvSpPr>
+          <p:cNvPr id="4" name="Shape 4"/>
+          <p:cNvSpPr txBox="1"/>
+          <p:nvPr/>
+        </p:nvSpPr>
+        <p:spPr>
+          <a:xfrm>
+            <a:off x="594360" y="347472"/>
+            <a:ext cx="10972800" cy="566928"/>
+          </a:xfrm>
+          <a:prstGeom prst="rect">
+            <a:avLst/>
+          </a:prstGeom>
+          <a:noFill/>
+          <a:ln>
+            <a:noFill/>
+          </a:ln>
+        </p:spPr>
+        <p:txBody>
+          <a:bodyPr wrap="square" lIns="0" tIns="0" rIns="0" bIns="0" anchor="top"/>
+          <a:lstStyle/>
+          <a:p>
+            <a:pPr marL="0" indent="0" algn="l">
+              <a:buNone/>
+            </a:pPr>
+            <a:r>
+              <a:rPr lang="ko-KR" sz="2700" dirty="0">
+                <a:b/>
+                <a:solidFill>
+                  <a:srgbClr val="0F3D66"/>
+                </a:solidFill>
+                <a:latin typeface="Malgun Gothic"/>
+                <a:ea typeface="Malgun Gothic"/>
+              </a:rPr>
+              <a:t>Statistics SQL Grouping</a:t>
+            </a:r>
+          </a:p>
+        </p:txBody>
+      </p:sp>
+      <p:sp>
+        <p:nvSpPr>
+          <p:cNvPr id="5" name="Shape 5"/>
+          <p:cNvSpPr txBox="1"/>
+          <p:nvPr/>
+        </p:nvSpPr>
+        <p:spPr>
+          <a:xfrm>
+            <a:off x="685800" y="1005840"/>
+            <a:ext cx="4023360" cy="2926080"/>
           </a:xfrm>
           <a:prstGeom prst="rect">
             <a:avLst/>
@@ -3945,14 +4249,14 @@
               <a:buChar char="•"/>
             </a:pPr>
             <a:r>
-              <a:rPr lang="ko-KR" sz="1900" dirty="0">
-                <a:solidFill>
-                  <a:srgbClr val="EAF6FF"/>
-                </a:solidFill>
-                <a:latin typeface="Malgun Gothic"/>
-                <a:ea typeface="Malgun Gothic"/>
-              </a:rPr>
-              <a:t>명확한 금칙어는 LLM 비용 없이 즉시 차단</a:t>
+              <a:rPr lang="ko-KR" sz="1700" dirty="0">
+                <a:solidFill>
+                  <a:srgbClr val="17324D"/>
+                </a:solidFill>
+                <a:latin typeface="Malgun Gothic"/>
+                <a:ea typeface="Malgun Gothic"/>
+              </a:rPr>
+              <a:t>age를 10단위 연령대로 그룹화</a:t>
             </a:r>
           </a:p>
           <a:p>
@@ -3960,14 +4264,14 @@
               <a:buChar char="•"/>
             </a:pPr>
             <a:r>
-              <a:rPr lang="ko-KR" sz="1900" dirty="0">
-                <a:solidFill>
-                  <a:srgbClr val="EAF6FF"/>
-                </a:solidFill>
-                <a:latin typeface="Malgun Gothic"/>
-                <a:ea typeface="Malgun Gothic"/>
-              </a:rPr>
-              <a:t>애매한 문맥은 프롬프트 기준으로 JSON result/target 판정</a:t>
+              <a:rPr lang="ko-KR" sz="1700" dirty="0">
+                <a:solidFill>
+                  <a:srgbClr val="17324D"/>
+                </a:solidFill>
+                <a:latin typeface="Malgun Gothic"/>
+                <a:ea typeface="Malgun Gothic"/>
+              </a:rPr>
+              <a:t>gender와 scene 기준 집계</a:t>
             </a:r>
           </a:p>
           <a:p>
@@ -3975,62 +4279,47 @@
               <a:buChar char="•"/>
             </a:pPr>
             <a:r>
-              <a:rPr lang="ko-KR" sz="1900" dirty="0">
-                <a:solidFill>
-                  <a:srgbClr val="EAF6FF"/>
-                </a:solidFill>
-                <a:latin typeface="Malgun Gothic"/>
-                <a:ea typeface="Malgun Gothic"/>
-              </a:rPr>
-              <a:t>닉네임만 위반하면 대체 닉네임으로 메시지는 살림</a:t>
-            </a:r>
-          </a:p>
-        </p:txBody>
-      </p:sp>
-      <p:cxnSp>
-        <p:nvCxnSpPr>
-          <p:cNvPr id="9" name="Arrow 9"/>
-          <p:cNvCxnSpPr/>
-          <p:nvPr/>
-        </p:nvCxnSpPr>
-        <p:spPr>
-          <a:xfrm>
-            <a:off x="3474720" y="1691640"/>
-            <a:ext cx="1188720" cy="0"/>
-          </a:xfrm>
-          <a:prstGeom prst="line">
-            <a:avLst/>
-          </a:prstGeom>
-          <a:ln w="25400">
+              <a:rPr lang="ko-KR" sz="1700" dirty="0">
+                <a:solidFill>
+                  <a:srgbClr val="17324D"/>
+                </a:solidFill>
+                <a:latin typeface="Malgun Gothic"/>
+                <a:ea typeface="Malgun Gothic"/>
+              </a:rPr>
+              <a:t>choice는 option_id, input은 answer_text_feeling 사용</a:t>
+            </a:r>
+          </a:p>
+        </p:txBody>
+      </p:sp>
+      <p:pic>
+        <p:nvPicPr>
+          <p:cNvPr id="6" name="Picture 6"/>
+          <p:cNvPicPr>
+            <a:picLocks noChangeAspect="1"/>
+          </p:cNvPicPr>
+          <p:nvPr/>
+        </p:nvPicPr>
+        <p:blipFill>
+          <a:blip r:embed="rId2"/>
+          <a:stretch>
+            <a:fillRect/>
+          </a:stretch>
+        </p:blipFill>
+        <p:spPr>
+          <a:xfrm>
+            <a:off x="4937760" y="868680"/>
+            <a:ext cx="6583680" cy="5440680"/>
+          </a:xfrm>
+          <a:prstGeom prst="rect">
+            <a:avLst/>
+          </a:prstGeom>
+          <a:ln w="12700">
             <a:solidFill>
-              <a:srgbClr val="EAF6FF"/>
+              <a:srgbClr val="C7E6FF"/>
             </a:solidFill>
-            <a:tailEnd type="triangle"/>
-          </a:ln>
-        </p:spPr>
-      </p:cxnSp>
-      <p:cxnSp>
-        <p:nvCxnSpPr>
-          <p:cNvPr id="10" name="Arrow 10"/>
-          <p:cNvCxnSpPr/>
-          <p:nvPr/>
-        </p:nvCxnSpPr>
-        <p:spPr>
-          <a:xfrm>
-            <a:off x="7406640" y="1691640"/>
-            <a:ext cx="1188720" cy="0"/>
-          </a:xfrm>
-          <a:prstGeom prst="line">
-            <a:avLst/>
-          </a:prstGeom>
-          <a:ln w="25400">
-            <a:solidFill>
-              <a:srgbClr val="EAF6FF"/>
-            </a:solidFill>
-            <a:tailEnd type="triangle"/>
-          </a:ln>
-        </p:spPr>
-      </p:cxnSp>
+          </a:ln>
+        </p:spPr>
+      </p:pic>
     </p:spTree>
   </p:cSld>
   <p:clrMapOvr>
@@ -4039,13 +4328,13 @@
 </p:sld>
 </file>
 
-<file path=ppt\slides\slide8.xml><?xml version="1.0" encoding="utf-8"?>
+<file path=ppt\slides\slide6.xml><?xml version="1.0" encoding="utf-8"?>
 <p:sld xmlns:a="http://schemas.openxmlformats.org/drawingml/2006/main" xmlns:r="http://schemas.openxmlformats.org/officeDocument/2006/relationships" xmlns:p="http://schemas.openxmlformats.org/presentationml/2006/main">
   <p:cSld>
     <p:bg>
       <p:bgPr>
         <a:solidFill>
-          <a:srgbClr val="101820"/>
+          <a:srgbClr val="F7FBFF"/>
         </a:solidFill>
         <a:effectLst/>
       </p:bgPr>
@@ -4079,7 +4368,7 @@
             <a:avLst/>
           </a:prstGeom>
           <a:solidFill>
-            <a:srgbClr val="101820">
+            <a:srgbClr val="F7FBFF">
               <a:alpha val="100000"/>
             </a:srgbClr>
           </a:solidFill>
@@ -4122,7 +4411,7 @@
             <a:avLst/>
           </a:prstGeom>
           <a:solidFill>
-            <a:srgbClr val="60D394">
+            <a:srgbClr val="37B7FF">
               <a:alpha val="100000"/>
             </a:srgbClr>
           </a:solidFill>
@@ -4180,12 +4469,12 @@
               <a:rPr lang="ko-KR" sz="2700" dirty="0">
                 <a:b/>
                 <a:solidFill>
-                  <a:srgbClr val="FFFFFF"/>
-                </a:solidFill>
-                <a:latin typeface="Malgun Gothic"/>
-                <a:ea typeface="Malgun Gothic"/>
-              </a:rPr>
-              <a:t>안정성 설계</a:t>
+                  <a:srgbClr val="0F3D66"/>
+                </a:solidFill>
+                <a:latin typeface="Malgun Gothic"/>
+                <a:ea typeface="Malgun Gothic"/>
+              </a:rPr>
+              <a:t>Statistics Payload</a:t>
             </a:r>
           </a:p>
         </p:txBody>
@@ -4198,8 +4487,8 @@
         </p:nvSpPr>
         <p:spPr>
           <a:xfrm>
-            <a:off x="822960" y="1097280"/>
-            <a:ext cx="10241280" cy="4389120"/>
+            <a:off x="685800" y="1005840"/>
+            <a:ext cx="4114800" cy="2743200"/>
           </a:xfrm>
           <a:prstGeom prst="rect">
             <a:avLst/>
@@ -4217,14 +4506,14 @@
               <a:buChar char="•"/>
             </a:pPr>
             <a:r>
-              <a:rPr lang="ko-KR" sz="2000" dirty="0">
-                <a:solidFill>
-                  <a:srgbClr val="EAF6FF"/>
-                </a:solidFill>
-                <a:latin typeface="Malgun Gothic"/>
-                <a:ea typeface="Malgun Gothic"/>
-              </a:rPr>
-              <a:t>LLM API 실패, JSON.parse 실패, 네트워크 오류는 기본 FAIL 처리</a:t>
+              <a:rPr lang="ko-KR" sz="1700" dirty="0">
+                <a:solidFill>
+                  <a:srgbClr val="17324D"/>
+                </a:solidFill>
+                <a:latin typeface="Malgun Gothic"/>
+                <a:ea typeface="Malgun Gothic"/>
+              </a:rPr>
+              <a:t>질문별 답변 count 합산</a:t>
             </a:r>
           </a:p>
           <a:p>
@@ -4232,14 +4521,14 @@
               <a:buChar char="•"/>
             </a:pPr>
             <a:r>
-              <a:rPr lang="ko-KR" sz="2000" dirty="0">
-                <a:solidFill>
-                  <a:srgbClr val="EAF6FF"/>
-                </a:solidFill>
-                <a:latin typeface="Malgun Gothic"/>
-                <a:ea typeface="Malgun Gothic"/>
-              </a:rPr>
-              <a:t>등록 응답은 빠르게 반환하고 검열은 백그라운드 비동기로 실행</a:t>
+              <a:rPr lang="ko-KR" sz="1700" dirty="0">
+                <a:solidFill>
+                  <a:srgbClr val="17324D"/>
+                </a:solidFill>
+                <a:latin typeface="Malgun Gothic"/>
+                <a:ea typeface="Malgun Gothic"/>
+              </a:rPr>
+              <a:t>percentage 계산</a:t>
             </a:r>
           </a:p>
           <a:p>
@@ -4247,33 +4536,105 @@
               <a:buChar char="•"/>
             </a:pPr>
             <a:r>
-              <a:rPr lang="ko-KR" sz="2000" dirty="0">
-                <a:solidFill>
-                  <a:srgbClr val="EAF6FF"/>
-                </a:solidFill>
-                <a:latin typeface="Malgun Gothic"/>
-                <a:ea typeface="Malgun Gothic"/>
-              </a:rPr>
-              <a:t>서버 재시작 시 PENDING 메시지를 재처리해 상태 불일치 복구</a:t>
-            </a:r>
-          </a:p>
-          <a:p>
-            <a:pPr marL="228600" indent="-171450" algn="l">
-              <a:buChar char="•"/>
-            </a:pPr>
-            <a:r>
-              <a:rPr lang="ko-KR" sz="2000" dirty="0">
-                <a:solidFill>
-                  <a:srgbClr val="EAF6FF"/>
-                </a:solidFill>
-                <a:latin typeface="Malgun Gothic"/>
-                <a:ea typeface="Malgun Gothic"/>
-              </a:rPr>
-              <a:t>목록 조회는 PASS만 반환해 부적절 메시지 노출 차단</a:t>
-            </a:r>
-          </a:p>
-        </p:txBody>
-      </p:sp>
+              <a:rPr lang="ko-KR" sz="1700" dirty="0">
+                <a:solidFill>
+                  <a:srgbClr val="17324D"/>
+                </a:solidFill>
+                <a:latin typeface="Malgun Gothic"/>
+                <a:ea typeface="Malgun Gothic"/>
+              </a:rPr>
+              <a:t>3D 확장용 nodes/links와 원그래프용 summary 동시 반환</a:t>
+            </a:r>
+          </a:p>
+        </p:txBody>
+      </p:sp>
+      <p:pic>
+        <p:nvPicPr>
+          <p:cNvPr id="6" name="Picture 6"/>
+          <p:cNvPicPr>
+            <a:picLocks noChangeAspect="1"/>
+          </p:cNvPicPr>
+          <p:nvPr/>
+        </p:nvPicPr>
+        <p:blipFill>
+          <a:blip r:embed="rId2"/>
+          <a:stretch>
+            <a:fillRect/>
+          </a:stretch>
+        </p:blipFill>
+        <p:spPr>
+          <a:xfrm>
+            <a:off x="4892040" y="914400"/>
+            <a:ext cx="3246120" cy="2514600"/>
+          </a:xfrm>
+          <a:prstGeom prst="rect">
+            <a:avLst/>
+          </a:prstGeom>
+          <a:ln w="12700">
+            <a:solidFill>
+              <a:srgbClr val="C7E6FF"/>
+            </a:solidFill>
+          </a:ln>
+        </p:spPr>
+      </p:pic>
+      <p:pic>
+        <p:nvPicPr>
+          <p:cNvPr id="7" name="Picture 7"/>
+          <p:cNvPicPr>
+            <a:picLocks noChangeAspect="1"/>
+          </p:cNvPicPr>
+          <p:nvPr/>
+        </p:nvPicPr>
+        <p:blipFill>
+          <a:blip r:embed="rId3"/>
+          <a:stretch>
+            <a:fillRect/>
+          </a:stretch>
+        </p:blipFill>
+        <p:spPr>
+          <a:xfrm>
+            <a:off x="8275320" y="914400"/>
+            <a:ext cx="3154680" cy="2514600"/>
+          </a:xfrm>
+          <a:prstGeom prst="rect">
+            <a:avLst/>
+          </a:prstGeom>
+          <a:ln w="12700">
+            <a:solidFill>
+              <a:srgbClr val="C7E6FF"/>
+            </a:solidFill>
+          </a:ln>
+        </p:spPr>
+      </p:pic>
+      <p:pic>
+        <p:nvPicPr>
+          <p:cNvPr id="8" name="Picture 8"/>
+          <p:cNvPicPr>
+            <a:picLocks noChangeAspect="1"/>
+          </p:cNvPicPr>
+          <p:nvPr/>
+        </p:nvPicPr>
+        <p:blipFill>
+          <a:blip r:embed="rId4"/>
+          <a:stretch>
+            <a:fillRect/>
+          </a:stretch>
+        </p:blipFill>
+        <p:spPr>
+          <a:xfrm>
+            <a:off x="6172200" y="3657600"/>
+            <a:ext cx="2331720" cy="2148840"/>
+          </a:xfrm>
+          <a:prstGeom prst="rect">
+            <a:avLst/>
+          </a:prstGeom>
+          <a:ln w="12700">
+            <a:solidFill>
+              <a:srgbClr val="C7E6FF"/>
+            </a:solidFill>
+          </a:ln>
+        </p:spPr>
+      </p:pic>
     </p:spTree>
   </p:cSld>
   <p:clrMapOvr>
@@ -4282,13 +4643,13 @@
 </p:sld>
 </file>
 
-<file path=ppt\slides\slide9.xml><?xml version="1.0" encoding="utf-8"?>
+<file path=ppt\slides\slide7.xml><?xml version="1.0" encoding="utf-8"?>
 <p:sld xmlns:a="http://schemas.openxmlformats.org/drawingml/2006/main" xmlns:r="http://schemas.openxmlformats.org/officeDocument/2006/relationships" xmlns:p="http://schemas.openxmlformats.org/presentationml/2006/main">
   <p:cSld>
     <p:bg>
       <p:bgPr>
         <a:solidFill>
-          <a:srgbClr val="13263A"/>
+          <a:srgbClr val="F7FBFF"/>
         </a:solidFill>
         <a:effectLst/>
       </p:bgPr>
@@ -4322,7 +4683,7 @@
             <a:avLst/>
           </a:prstGeom>
           <a:solidFill>
-            <a:srgbClr val="13263A">
+            <a:srgbClr val="F7FBFF">
               <a:alpha val="100000"/>
             </a:srgbClr>
           </a:solidFill>
@@ -4365,7 +4726,7 @@
             <a:avLst/>
           </a:prstGeom>
           <a:solidFill>
-            <a:srgbClr val="FFD166">
+            <a:srgbClr val="37B7FF">
               <a:alpha val="100000"/>
             </a:srgbClr>
           </a:solidFill>
@@ -4423,12 +4784,12 @@
               <a:rPr lang="ko-KR" sz="2700" dirty="0">
                 <a:b/>
                 <a:solidFill>
-                  <a:srgbClr val="FFFFFF"/>
-                </a:solidFill>
-                <a:latin typeface="Malgun Gothic"/>
-                <a:ea typeface="Malgun Gothic"/>
-              </a:rPr>
-              <a:t>개인화 기능</a:t>
+                  <a:srgbClr val="0F3D66"/>
+                </a:solidFill>
+                <a:latin typeface="Malgun Gothic"/>
+                <a:ea typeface="Malgun Gothic"/>
+              </a:rPr>
+              <a:t>Warm Chat Moderation</a:t>
             </a:r>
           </a:p>
         </p:txBody>
@@ -4441,8 +4802,192 @@
         </p:nvSpPr>
         <p:spPr>
           <a:xfrm>
-            <a:off x="777240" y="1143000"/>
-            <a:ext cx="5120640" cy="4114800"/>
+            <a:off x="731520" y="1097280"/>
+            <a:ext cx="2286000" cy="685800"/>
+          </a:xfrm>
+          <a:prstGeom prst="roundRect">
+            <a:avLst/>
+          </a:prstGeom>
+          <a:solidFill>
+            <a:srgbClr val="DDF1FF">
+              <a:alpha val="100000"/>
+            </a:srgbClr>
+          </a:solidFill>
+          <a:ln w="12700">
+            <a:solidFill>
+              <a:srgbClr val="9BD6FF"/>
+            </a:solidFill>
+          </a:ln>
+        </p:spPr>
+        <p:txBody>
+          <a:bodyPr wrap="square" lIns="109728" tIns="73152" rIns="109728" bIns="73152" anchor="mid"/>
+          <a:lstStyle/>
+          <a:p>
+            <a:pPr marL="0" indent="0" algn="l">
+              <a:buNone/>
+            </a:pPr>
+            <a:r>
+              <a:rPr lang="ko-KR" sz="1600" dirty="0">
+                <a:b/>
+                <a:solidFill>
+                  <a:srgbClr val="0F3D66"/>
+                </a:solidFill>
+                <a:latin typeface="Malgun Gothic"/>
+                <a:ea typeface="Malgun Gothic"/>
+              </a:rPr>
+              <a:t>입력 검증</a:t>
+            </a:r>
+          </a:p>
+        </p:txBody>
+      </p:sp>
+      <p:sp>
+        <p:nvSpPr>
+          <p:cNvPr id="6" name="Shape 6"/>
+          <p:cNvSpPr txBox="1"/>
+          <p:nvPr/>
+        </p:nvSpPr>
+        <p:spPr>
+          <a:xfrm>
+            <a:off x="3474720" y="1097280"/>
+            <a:ext cx="2286000" cy="685800"/>
+          </a:xfrm>
+          <a:prstGeom prst="roundRect">
+            <a:avLst/>
+          </a:prstGeom>
+          <a:solidFill>
+            <a:srgbClr val="EAF7FF">
+              <a:alpha val="100000"/>
+            </a:srgbClr>
+          </a:solidFill>
+          <a:ln w="12700">
+            <a:solidFill>
+              <a:srgbClr val="9BD6FF"/>
+            </a:solidFill>
+          </a:ln>
+        </p:spPr>
+        <p:txBody>
+          <a:bodyPr wrap="square" lIns="109728" tIns="73152" rIns="109728" bIns="73152" anchor="mid"/>
+          <a:lstStyle/>
+          <a:p>
+            <a:pPr marL="0" indent="0" algn="l">
+              <a:buNone/>
+            </a:pPr>
+            <a:r>
+              <a:rPr lang="ko-KR" sz="1600" dirty="0">
+                <a:b/>
+                <a:solidFill>
+                  <a:srgbClr val="0F3D66"/>
+                </a:solidFill>
+                <a:latin typeface="Malgun Gothic"/>
+                <a:ea typeface="Malgun Gothic"/>
+              </a:rPr>
+              <a:t>Trie 필터</a:t>
+            </a:r>
+          </a:p>
+        </p:txBody>
+      </p:sp>
+      <p:sp>
+        <p:nvSpPr>
+          <p:cNvPr id="7" name="Shape 7"/>
+          <p:cNvSpPr txBox="1"/>
+          <p:nvPr/>
+        </p:nvSpPr>
+        <p:spPr>
+          <a:xfrm>
+            <a:off x="6217920" y="1097280"/>
+            <a:ext cx="2286000" cy="685800"/>
+          </a:xfrm>
+          <a:prstGeom prst="roundRect">
+            <a:avLst/>
+          </a:prstGeom>
+          <a:solidFill>
+            <a:srgbClr val="F3FBFF">
+              <a:alpha val="100000"/>
+            </a:srgbClr>
+          </a:solidFill>
+          <a:ln w="12700">
+            <a:solidFill>
+              <a:srgbClr val="9BD6FF"/>
+            </a:solidFill>
+          </a:ln>
+        </p:spPr>
+        <p:txBody>
+          <a:bodyPr wrap="square" lIns="109728" tIns="73152" rIns="109728" bIns="73152" anchor="mid"/>
+          <a:lstStyle/>
+          <a:p>
+            <a:pPr marL="0" indent="0" algn="l">
+              <a:buNone/>
+            </a:pPr>
+            <a:r>
+              <a:rPr lang="ko-KR" sz="1600" dirty="0">
+                <a:b/>
+                <a:solidFill>
+                  <a:srgbClr val="0F3D66"/>
+                </a:solidFill>
+                <a:latin typeface="Malgun Gothic"/>
+                <a:ea typeface="Malgun Gothic"/>
+              </a:rPr>
+              <a:t>LLM RAG</a:t>
+            </a:r>
+          </a:p>
+        </p:txBody>
+      </p:sp>
+      <p:sp>
+        <p:nvSpPr>
+          <p:cNvPr id="8" name="Shape 8"/>
+          <p:cNvSpPr txBox="1"/>
+          <p:nvPr/>
+        </p:nvSpPr>
+        <p:spPr>
+          <a:xfrm>
+            <a:off x="8961120" y="1097280"/>
+            <a:ext cx="2286000" cy="685800"/>
+          </a:xfrm>
+          <a:prstGeom prst="roundRect">
+            <a:avLst/>
+          </a:prstGeom>
+          <a:solidFill>
+            <a:srgbClr val="FFFFFF">
+              <a:alpha val="100000"/>
+            </a:srgbClr>
+          </a:solidFill>
+          <a:ln w="12700">
+            <a:solidFill>
+              <a:srgbClr val="9BD6FF"/>
+            </a:solidFill>
+          </a:ln>
+        </p:spPr>
+        <p:txBody>
+          <a:bodyPr wrap="square" lIns="109728" tIns="73152" rIns="109728" bIns="73152" anchor="mid"/>
+          <a:lstStyle/>
+          <a:p>
+            <a:pPr marL="0" indent="0" algn="l">
+              <a:buNone/>
+            </a:pPr>
+            <a:r>
+              <a:rPr lang="ko-KR" sz="1600" dirty="0">
+                <a:b/>
+                <a:solidFill>
+                  <a:srgbClr val="0F3D66"/>
+                </a:solidFill>
+                <a:latin typeface="Malgun Gothic"/>
+                <a:ea typeface="Malgun Gothic"/>
+              </a:rPr>
+              <a:t>DB 상태</a:t>
+            </a:r>
+          </a:p>
+        </p:txBody>
+      </p:sp>
+      <p:sp>
+        <p:nvSpPr>
+          <p:cNvPr id="9" name="Shape 9"/>
+          <p:cNvSpPr txBox="1"/>
+          <p:nvPr/>
+        </p:nvSpPr>
+        <p:spPr>
+          <a:xfrm>
+            <a:off x="777240" y="2743200"/>
+            <a:ext cx="4663440" cy="2103120"/>
           </a:xfrm>
           <a:prstGeom prst="rect">
             <a:avLst/>
@@ -4460,14 +5005,14 @@
               <a:buChar char="•"/>
             </a:pPr>
             <a:r>
-              <a:rPr lang="ko-KR" sz="1900" dirty="0">
-                <a:solidFill>
-                  <a:srgbClr val="EAF6FF"/>
-                </a:solidFill>
-                <a:latin typeface="Malgun Gothic"/>
-                <a:ea typeface="Malgun Gothic"/>
-              </a:rPr>
-              <a:t>isolation_user_info 쿠키 사용</a:t>
+              <a:rPr lang="ko-KR" sz="1800" dirty="0">
+                <a:solidFill>
+                  <a:srgbClr val="17324D"/>
+                </a:solidFill>
+                <a:latin typeface="Malgun Gothic"/>
+                <a:ea typeface="Malgun Gothic"/>
+              </a:rPr>
+              <a:t>명확한 금칙어는 LLM 호출 없이 즉시 차단</a:t>
             </a:r>
           </a:p>
           <a:p>
@@ -4475,14 +5020,14 @@
               <a:buChar char="•"/>
             </a:pPr>
             <a:r>
-              <a:rPr lang="ko-KR" sz="1900" dirty="0">
-                <a:solidFill>
-                  <a:srgbClr val="EAF6FF"/>
-                </a:solidFill>
-                <a:latin typeface="Malgun Gothic"/>
-                <a:ea typeface="Malgun Gothic"/>
-              </a:rPr>
-              <a:t>id: 개인 설문 결과와 내 메시지 조회</a:t>
+              <a:rPr lang="ko-KR" sz="1800" dirty="0">
+                <a:solidFill>
+                  <a:srgbClr val="17324D"/>
+                </a:solidFill>
+                <a:latin typeface="Malgun Gothic"/>
+                <a:ea typeface="Malgun Gothic"/>
+              </a:rPr>
+              <a:t>문맥 판단은 GPT JSON 응답으로 처리</a:t>
             </a:r>
           </a:p>
           <a:p>
@@ -4490,68 +5035,322 @@
               <a:buChar char="•"/>
             </a:pPr>
             <a:r>
-              <a:rPr lang="ko-KR" sz="1900" dirty="0">
-                <a:solidFill>
-                  <a:srgbClr val="EAF6FF"/>
-                </a:solidFill>
-                <a:latin typeface="Malgun Gothic"/>
-                <a:ea typeface="Malgun Gothic"/>
-              </a:rPr>
-              <a:t>generation: Step2 B 콘텐츠 분기</a:t>
-            </a:r>
-          </a:p>
+              <a:rPr lang="ko-KR" sz="1800" dirty="0">
+                <a:solidFill>
+                  <a:srgbClr val="17324D"/>
+                </a:solidFill>
+                <a:latin typeface="Malgun Gothic"/>
+                <a:ea typeface="Malgun Gothic"/>
+              </a:rPr>
+              <a:t>PASS 메시지만 화면에 노출</a:t>
+            </a:r>
+          </a:p>
+        </p:txBody>
+      </p:sp>
+      <p:pic>
+        <p:nvPicPr>
+          <p:cNvPr id="10" name="Picture 10"/>
+          <p:cNvPicPr>
+            <a:picLocks noChangeAspect="1"/>
+          </p:cNvPicPr>
+          <p:nvPr/>
+        </p:nvPicPr>
+        <p:blipFill>
+          <a:blip r:embed="rId2"/>
+          <a:stretch>
+            <a:fillRect/>
+          </a:stretch>
+        </p:blipFill>
+        <p:spPr>
+          <a:xfrm>
+            <a:off x="6903720" y="2331720"/>
+            <a:ext cx="2423160" cy="3794760"/>
+          </a:xfrm>
+          <a:prstGeom prst="rect">
+            <a:avLst/>
+          </a:prstGeom>
+          <a:ln w="12700">
+            <a:solidFill>
+              <a:srgbClr val="C7E6FF"/>
+            </a:solidFill>
+          </a:ln>
+        </p:spPr>
+      </p:pic>
+      <p:cxnSp>
+        <p:nvCxnSpPr>
+          <p:cNvPr id="11" name="Arrow 11"/>
+          <p:cNvCxnSpPr/>
+          <p:nvPr/>
+        </p:nvCxnSpPr>
+        <p:spPr>
+          <a:xfrm>
+            <a:off x="3017520" y="1444752"/>
+            <a:ext cx="457200" cy="0"/>
+          </a:xfrm>
+          <a:prstGeom prst="line">
+            <a:avLst/>
+          </a:prstGeom>
+          <a:ln w="25400">
+            <a:solidFill>
+              <a:srgbClr val="5DAFEA"/>
+            </a:solidFill>
+            <a:tailEnd type="triangle"/>
+          </a:ln>
+        </p:spPr>
+      </p:cxnSp>
+      <p:cxnSp>
+        <p:nvCxnSpPr>
+          <p:cNvPr id="12" name="Arrow 12"/>
+          <p:cNvCxnSpPr/>
+          <p:nvPr/>
+        </p:nvCxnSpPr>
+        <p:spPr>
+          <a:xfrm>
+            <a:off x="5760720" y="1444752"/>
+            <a:ext cx="457200" cy="0"/>
+          </a:xfrm>
+          <a:prstGeom prst="line">
+            <a:avLst/>
+          </a:prstGeom>
+          <a:ln w="25400">
+            <a:solidFill>
+              <a:srgbClr val="5DAFEA"/>
+            </a:solidFill>
+            <a:tailEnd type="triangle"/>
+          </a:ln>
+        </p:spPr>
+      </p:cxnSp>
+      <p:cxnSp>
+        <p:nvCxnSpPr>
+          <p:cNvPr id="13" name="Arrow 13"/>
+          <p:cNvCxnSpPr/>
+          <p:nvPr/>
+        </p:nvCxnSpPr>
+        <p:spPr>
+          <a:xfrm>
+            <a:off x="8503920" y="1444752"/>
+            <a:ext cx="457200" cy="0"/>
+          </a:xfrm>
+          <a:prstGeom prst="line">
+            <a:avLst/>
+          </a:prstGeom>
+          <a:ln w="25400">
+            <a:solidFill>
+              <a:srgbClr val="5DAFEA"/>
+            </a:solidFill>
+            <a:tailEnd type="triangle"/>
+          </a:ln>
+        </p:spPr>
+      </p:cxnSp>
+    </p:spTree>
+  </p:cSld>
+  <p:clrMapOvr>
+    <a:masterClrMapping/>
+  </p:clrMapOvr>
+</p:sld>
+</file>
+
+<file path=ppt\slides\slide8.xml><?xml version="1.0" encoding="utf-8"?>
+<p:sld xmlns:a="http://schemas.openxmlformats.org/drawingml/2006/main" xmlns:r="http://schemas.openxmlformats.org/officeDocument/2006/relationships" xmlns:p="http://schemas.openxmlformats.org/presentationml/2006/main">
+  <p:cSld>
+    <p:bg>
+      <p:bgPr>
+        <a:solidFill>
+          <a:srgbClr val="F7FBFF"/>
+        </a:solidFill>
+        <a:effectLst/>
+      </p:bgPr>
+    </p:bg>
+    <p:spTree>
+      <p:nvGrpSpPr>
+        <p:cNvPr id="1" name=""/>
+        <p:cNvGrpSpPr/>
+        <p:nvPr/>
+      </p:nvGrpSpPr>
+      <p:grpSpPr>
+        <a:xfrm>
+          <a:off x="0" y="0"/>
+          <a:ext cx="0" cy="0"/>
+          <a:chOff x="0" y="0"/>
+          <a:chExt cx="0" cy="0"/>
+        </a:xfrm>
+      </p:grpSpPr>
+      <p:sp>
+        <p:nvSpPr>
+          <p:cNvPr id="2" name="Shape 2"/>
+          <p:cNvSpPr txBox="1"/>
+          <p:nvPr/>
+        </p:nvSpPr>
+        <p:spPr>
+          <a:xfrm>
+            <a:off x="0" y="0"/>
+            <a:ext cx="12192000" cy="6858000"/>
+          </a:xfrm>
+          <a:prstGeom prst="rect">
+            <a:avLst/>
+          </a:prstGeom>
+          <a:solidFill>
+            <a:srgbClr val="F7FBFF">
+              <a:alpha val="100000"/>
+            </a:srgbClr>
+          </a:solidFill>
+          <a:ln>
+            <a:noFill/>
+          </a:ln>
+        </p:spPr>
+        <p:txBody>
+          <a:bodyPr wrap="square" lIns="109728" tIns="73152" rIns="109728" bIns="73152" anchor="mid"/>
+          <a:lstStyle/>
+          <a:p>
+            <a:pPr marL="0" indent="0" algn="l">
+              <a:buNone/>
+            </a:pPr>
+            <a:r>
+              <a:rPr lang="ko-KR" sz="2200" dirty="0">
+                <a:solidFill>
+                  <a:srgbClr val="111111"/>
+                </a:solidFill>
+                <a:latin typeface="Malgun Gothic"/>
+                <a:ea typeface="Malgun Gothic"/>
+              </a:rPr>
+              <a:t/>
+            </a:r>
+          </a:p>
+        </p:txBody>
+      </p:sp>
+      <p:sp>
+        <p:nvSpPr>
+          <p:cNvPr id="3" name="Shape 3"/>
+          <p:cNvSpPr txBox="1"/>
+          <p:nvPr/>
+        </p:nvSpPr>
+        <p:spPr>
+          <a:xfrm>
+            <a:off x="0" y="0"/>
+            <a:ext cx="146304" cy="6858000"/>
+          </a:xfrm>
+          <a:prstGeom prst="rect">
+            <a:avLst/>
+          </a:prstGeom>
+          <a:solidFill>
+            <a:srgbClr val="37B7FF">
+              <a:alpha val="100000"/>
+            </a:srgbClr>
+          </a:solidFill>
+          <a:ln>
+            <a:noFill/>
+          </a:ln>
+        </p:spPr>
+        <p:txBody>
+          <a:bodyPr wrap="square" lIns="109728" tIns="73152" rIns="109728" bIns="73152" anchor="mid"/>
+          <a:lstStyle/>
+          <a:p>
+            <a:pPr marL="0" indent="0" algn="l">
+              <a:buNone/>
+            </a:pPr>
+            <a:r>
+              <a:rPr lang="ko-KR" sz="2200" dirty="0">
+                <a:solidFill>
+                  <a:srgbClr val="111111"/>
+                </a:solidFill>
+                <a:latin typeface="Malgun Gothic"/>
+                <a:ea typeface="Malgun Gothic"/>
+              </a:rPr>
+              <a:t/>
+            </a:r>
+          </a:p>
+        </p:txBody>
+      </p:sp>
+      <p:sp>
+        <p:nvSpPr>
+          <p:cNvPr id="4" name="Shape 4"/>
+          <p:cNvSpPr txBox="1"/>
+          <p:nvPr/>
+        </p:nvSpPr>
+        <p:spPr>
+          <a:xfrm>
+            <a:off x="594360" y="347472"/>
+            <a:ext cx="10972800" cy="566928"/>
+          </a:xfrm>
+          <a:prstGeom prst="rect">
+            <a:avLst/>
+          </a:prstGeom>
+          <a:noFill/>
+          <a:ln>
+            <a:noFill/>
+          </a:ln>
+        </p:spPr>
+        <p:txBody>
+          <a:bodyPr wrap="square" lIns="0" tIns="0" rIns="0" bIns="0" anchor="top"/>
+          <a:lstStyle/>
+          <a:p>
+            <a:pPr marL="0" indent="0" algn="l">
+              <a:buNone/>
+            </a:pPr>
+            <a:r>
+              <a:rPr lang="ko-KR" sz="2700" dirty="0">
+                <a:b/>
+                <a:solidFill>
+                  <a:srgbClr val="0F3D66"/>
+                </a:solidFill>
+                <a:latin typeface="Malgun Gothic"/>
+                <a:ea typeface="Malgun Gothic"/>
+              </a:rPr>
+              <a:t>RAG Filter Code</a:t>
+            </a:r>
+          </a:p>
+        </p:txBody>
+      </p:sp>
+      <p:sp>
+        <p:nvSpPr>
+          <p:cNvPr id="5" name="Shape 5"/>
+          <p:cNvSpPr txBox="1"/>
+          <p:nvPr/>
+        </p:nvSpPr>
+        <p:spPr>
+          <a:xfrm>
+            <a:off x="685800" y="960120"/>
+            <a:ext cx="3200400" cy="2560320"/>
+          </a:xfrm>
+          <a:prstGeom prst="rect">
+            <a:avLst/>
+          </a:prstGeom>
+          <a:noFill/>
+          <a:ln>
+            <a:noFill/>
+          </a:ln>
+        </p:spPr>
+        <p:txBody>
+          <a:bodyPr wrap="square" lIns="45720" tIns="45720" rIns="45720" bIns="45720" anchor="top"/>
+          <a:lstStyle/>
           <a:p>
             <a:pPr marL="228600" indent="-171450" algn="l">
               <a:buChar char="•"/>
             </a:pPr>
             <a:r>
-              <a:rPr lang="ko-KR" sz="1900" dirty="0">
-                <a:solidFill>
-                  <a:srgbClr val="EAF6FF"/>
-                </a:solidFill>
-                <a:latin typeface="Malgun Gothic"/>
-                <a:ea typeface="Malgun Gothic"/>
-              </a:rPr>
-              <a:t>gender/name: 설문 흐름 정보 유지</a:t>
-            </a:r>
-          </a:p>
-        </p:txBody>
-      </p:sp>
-      <p:sp>
-        <p:nvSpPr>
-          <p:cNvPr id="6" name="Shape 6"/>
-          <p:cNvSpPr txBox="1"/>
-          <p:nvPr/>
-        </p:nvSpPr>
-        <p:spPr>
-          <a:xfrm>
-            <a:off x="6400800" y="1143000"/>
-            <a:ext cx="5029200" cy="4114800"/>
-          </a:xfrm>
-          <a:prstGeom prst="rect">
-            <a:avLst/>
-          </a:prstGeom>
-          <a:noFill/>
-          <a:ln>
-            <a:noFill/>
-          </a:ln>
-        </p:spPr>
-        <p:txBody>
-          <a:bodyPr wrap="square" lIns="45720" tIns="45720" rIns="45720" bIns="45720" anchor="top"/>
-          <a:lstStyle/>
+              <a:rPr lang="ko-KR" sz="1700" dirty="0">
+                <a:solidFill>
+                  <a:srgbClr val="17324D"/>
+                </a:solidFill>
+                <a:latin typeface="Malgun Gothic"/>
+                <a:ea typeface="Malgun Gothic"/>
+              </a:rPr>
+              <a:t>1차 Trie 필터</a:t>
+            </a:r>
+          </a:p>
           <a:p>
             <a:pPr marL="228600" indent="-171450" algn="l">
               <a:buChar char="•"/>
             </a:pPr>
             <a:r>
-              <a:rPr lang="ko-KR" sz="1900" dirty="0">
-                <a:solidFill>
-                  <a:srgbClr val="EAF6FF"/>
-                </a:solidFill>
-                <a:latin typeface="Malgun Gothic"/>
-                <a:ea typeface="Malgun Gothic"/>
-              </a:rPr>
-              <a:t>내 메시지는 오른쪽 정렬</a:t>
+              <a:rPr lang="ko-KR" sz="1700" dirty="0">
+                <a:solidFill>
+                  <a:srgbClr val="17324D"/>
+                </a:solidFill>
+                <a:latin typeface="Malgun Gothic"/>
+                <a:ea typeface="Malgun Gothic"/>
+              </a:rPr>
+              <a:t>2차 GPT-4o mini RAG</a:t>
             </a:r>
           </a:p>
           <a:p>
@@ -4559,29 +5358,299 @@
               <a:buChar char="•"/>
             </a:pPr>
             <a:r>
-              <a:rPr lang="ko-KR" sz="1900" dirty="0">
-                <a:solidFill>
-                  <a:srgbClr val="EAF6FF"/>
-                </a:solidFill>
-                <a:latin typeface="Malgun Gothic"/>
-                <a:ea typeface="Malgun Gothic"/>
-              </a:rPr>
-              <a:t>타인 메시지는 왼쪽 정렬</a:t>
-            </a:r>
-          </a:p>
+              <a:rPr lang="ko-KR" sz="1700" dirty="0">
+                <a:solidFill>
+                  <a:srgbClr val="17324D"/>
+                </a:solidFill>
+                <a:latin typeface="Malgun Gothic"/>
+                <a:ea typeface="Malgun Gothic"/>
+              </a:rPr>
+              <a:t>JSON.parse 결과를 DB 정책과 연결</a:t>
+            </a:r>
+          </a:p>
+        </p:txBody>
+      </p:sp>
+      <p:pic>
+        <p:nvPicPr>
+          <p:cNvPr id="6" name="Picture 6"/>
+          <p:cNvPicPr>
+            <a:picLocks noChangeAspect="1"/>
+          </p:cNvPicPr>
+          <p:nvPr/>
+        </p:nvPicPr>
+        <p:blipFill>
+          <a:blip r:embed="rId2"/>
+          <a:stretch>
+            <a:fillRect/>
+          </a:stretch>
+        </p:blipFill>
+        <p:spPr>
+          <a:xfrm>
+            <a:off x="4023360" y="868680"/>
+            <a:ext cx="3474720" cy="2514600"/>
+          </a:xfrm>
+          <a:prstGeom prst="rect">
+            <a:avLst/>
+          </a:prstGeom>
+          <a:ln w="12700">
+            <a:solidFill>
+              <a:srgbClr val="C7E6FF"/>
+            </a:solidFill>
+          </a:ln>
+        </p:spPr>
+      </p:pic>
+      <p:pic>
+        <p:nvPicPr>
+          <p:cNvPr id="7" name="Picture 7"/>
+          <p:cNvPicPr>
+            <a:picLocks noChangeAspect="1"/>
+          </p:cNvPicPr>
+          <p:nvPr/>
+        </p:nvPicPr>
+        <p:blipFill>
+          <a:blip r:embed="rId3"/>
+          <a:stretch>
+            <a:fillRect/>
+          </a:stretch>
+        </p:blipFill>
+        <p:spPr>
+          <a:xfrm>
+            <a:off x="7726680" y="868680"/>
+            <a:ext cx="3611880" cy="2514600"/>
+          </a:xfrm>
+          <a:prstGeom prst="rect">
+            <a:avLst/>
+          </a:prstGeom>
+          <a:ln w="12700">
+            <a:solidFill>
+              <a:srgbClr val="C7E6FF"/>
+            </a:solidFill>
+          </a:ln>
+        </p:spPr>
+      </p:pic>
+      <p:pic>
+        <p:nvPicPr>
+          <p:cNvPr id="8" name="Picture 8"/>
+          <p:cNvPicPr>
+            <a:picLocks noChangeAspect="1"/>
+          </p:cNvPicPr>
+          <p:nvPr/>
+        </p:nvPicPr>
+        <p:blipFill>
+          <a:blip r:embed="rId4"/>
+          <a:stretch>
+            <a:fillRect/>
+          </a:stretch>
+        </p:blipFill>
+        <p:spPr>
+          <a:xfrm>
+            <a:off x="4023360" y="3611880"/>
+            <a:ext cx="7315200" cy="2240280"/>
+          </a:xfrm>
+          <a:prstGeom prst="rect">
+            <a:avLst/>
+          </a:prstGeom>
+          <a:ln w="12700">
+            <a:solidFill>
+              <a:srgbClr val="C7E6FF"/>
+            </a:solidFill>
+          </a:ln>
+        </p:spPr>
+      </p:pic>
+    </p:spTree>
+  </p:cSld>
+  <p:clrMapOvr>
+    <a:masterClrMapping/>
+  </p:clrMapOvr>
+</p:sld>
+</file>
+
+<file path=ppt\slides\slide9.xml><?xml version="1.0" encoding="utf-8"?>
+<p:sld xmlns:a="http://schemas.openxmlformats.org/drawingml/2006/main" xmlns:r="http://schemas.openxmlformats.org/officeDocument/2006/relationships" xmlns:p="http://schemas.openxmlformats.org/presentationml/2006/main">
+  <p:cSld>
+    <p:bg>
+      <p:bgPr>
+        <a:solidFill>
+          <a:srgbClr val="F7FBFF"/>
+        </a:solidFill>
+        <a:effectLst/>
+      </p:bgPr>
+    </p:bg>
+    <p:spTree>
+      <p:nvGrpSpPr>
+        <p:cNvPr id="1" name=""/>
+        <p:cNvGrpSpPr/>
+        <p:nvPr/>
+      </p:nvGrpSpPr>
+      <p:grpSpPr>
+        <a:xfrm>
+          <a:off x="0" y="0"/>
+          <a:ext cx="0" cy="0"/>
+          <a:chOff x="0" y="0"/>
+          <a:chExt cx="0" cy="0"/>
+        </a:xfrm>
+      </p:grpSpPr>
+      <p:sp>
+        <p:nvSpPr>
+          <p:cNvPr id="2" name="Shape 2"/>
+          <p:cNvSpPr txBox="1"/>
+          <p:nvPr/>
+        </p:nvSpPr>
+        <p:spPr>
+          <a:xfrm>
+            <a:off x="0" y="0"/>
+            <a:ext cx="12192000" cy="6858000"/>
+          </a:xfrm>
+          <a:prstGeom prst="rect">
+            <a:avLst/>
+          </a:prstGeom>
+          <a:solidFill>
+            <a:srgbClr val="F7FBFF">
+              <a:alpha val="100000"/>
+            </a:srgbClr>
+          </a:solidFill>
+          <a:ln>
+            <a:noFill/>
+          </a:ln>
+        </p:spPr>
+        <p:txBody>
+          <a:bodyPr wrap="square" lIns="109728" tIns="73152" rIns="109728" bIns="73152" anchor="mid"/>
+          <a:lstStyle/>
+          <a:p>
+            <a:pPr marL="0" indent="0" algn="l">
+              <a:buNone/>
+            </a:pPr>
+            <a:r>
+              <a:rPr lang="ko-KR" sz="2200" dirty="0">
+                <a:solidFill>
+                  <a:srgbClr val="111111"/>
+                </a:solidFill>
+                <a:latin typeface="Malgun Gothic"/>
+                <a:ea typeface="Malgun Gothic"/>
+              </a:rPr>
+              <a:t/>
+            </a:r>
+          </a:p>
+        </p:txBody>
+      </p:sp>
+      <p:sp>
+        <p:nvSpPr>
+          <p:cNvPr id="3" name="Shape 3"/>
+          <p:cNvSpPr txBox="1"/>
+          <p:nvPr/>
+        </p:nvSpPr>
+        <p:spPr>
+          <a:xfrm>
+            <a:off x="0" y="0"/>
+            <a:ext cx="146304" cy="6858000"/>
+          </a:xfrm>
+          <a:prstGeom prst="rect">
+            <a:avLst/>
+          </a:prstGeom>
+          <a:solidFill>
+            <a:srgbClr val="37B7FF">
+              <a:alpha val="100000"/>
+            </a:srgbClr>
+          </a:solidFill>
+          <a:ln>
+            <a:noFill/>
+          </a:ln>
+        </p:spPr>
+        <p:txBody>
+          <a:bodyPr wrap="square" lIns="109728" tIns="73152" rIns="109728" bIns="73152" anchor="mid"/>
+          <a:lstStyle/>
+          <a:p>
+            <a:pPr marL="0" indent="0" algn="l">
+              <a:buNone/>
+            </a:pPr>
+            <a:r>
+              <a:rPr lang="ko-KR" sz="2200" dirty="0">
+                <a:solidFill>
+                  <a:srgbClr val="111111"/>
+                </a:solidFill>
+                <a:latin typeface="Malgun Gothic"/>
+                <a:ea typeface="Malgun Gothic"/>
+              </a:rPr>
+              <a:t/>
+            </a:r>
+          </a:p>
+        </p:txBody>
+      </p:sp>
+      <p:sp>
+        <p:nvSpPr>
+          <p:cNvPr id="4" name="Shape 4"/>
+          <p:cNvSpPr txBox="1"/>
+          <p:nvPr/>
+        </p:nvSpPr>
+        <p:spPr>
+          <a:xfrm>
+            <a:off x="594360" y="347472"/>
+            <a:ext cx="10972800" cy="566928"/>
+          </a:xfrm>
+          <a:prstGeom prst="rect">
+            <a:avLst/>
+          </a:prstGeom>
+          <a:noFill/>
+          <a:ln>
+            <a:noFill/>
+          </a:ln>
+        </p:spPr>
+        <p:txBody>
+          <a:bodyPr wrap="square" lIns="0" tIns="0" rIns="0" bIns="0" anchor="top"/>
+          <a:lstStyle/>
+          <a:p>
+            <a:pPr marL="0" indent="0" algn="l">
+              <a:buNone/>
+            </a:pPr>
+            <a:r>
+              <a:rPr lang="ko-KR" sz="2700" dirty="0">
+                <a:b/>
+                <a:solidFill>
+                  <a:srgbClr val="0F3D66"/>
+                </a:solidFill>
+                <a:latin typeface="Malgun Gothic"/>
+                <a:ea typeface="Malgun Gothic"/>
+              </a:rPr>
+              <a:t>Async Pipeline &amp; Recovery</a:t>
+            </a:r>
+          </a:p>
+        </p:txBody>
+      </p:sp>
+      <p:sp>
+        <p:nvSpPr>
+          <p:cNvPr id="5" name="Shape 5"/>
+          <p:cNvSpPr txBox="1"/>
+          <p:nvPr/>
+        </p:nvSpPr>
+        <p:spPr>
+          <a:xfrm>
+            <a:off x="685800" y="960120"/>
+            <a:ext cx="3383280" cy="2834640"/>
+          </a:xfrm>
+          <a:prstGeom prst="rect">
+            <a:avLst/>
+          </a:prstGeom>
+          <a:noFill/>
+          <a:ln>
+            <a:noFill/>
+          </a:ln>
+        </p:spPr>
+        <p:txBody>
+          <a:bodyPr wrap="square" lIns="45720" tIns="45720" rIns="45720" bIns="45720" anchor="top"/>
+          <a:lstStyle/>
           <a:p>
             <a:pPr marL="228600" indent="-171450" algn="l">
               <a:buChar char="•"/>
             </a:pPr>
             <a:r>
-              <a:rPr lang="ko-KR" sz="1900" dirty="0">
-                <a:solidFill>
-                  <a:srgbClr val="EAF6FF"/>
-                </a:solidFill>
-                <a:latin typeface="Malgun Gothic"/>
-                <a:ea typeface="Malgun Gothic"/>
-              </a:rPr>
-              <a:t>내가 쓴 메시지 보기 모달 제공</a:t>
+              <a:rPr lang="ko-KR" sz="1700" dirty="0">
+                <a:solidFill>
+                  <a:srgbClr val="17324D"/>
+                </a:solidFill>
+                <a:latin typeface="Malgun Gothic"/>
+                <a:ea typeface="Malgun Gothic"/>
+              </a:rPr>
+              <a:t>메시지는 먼저 PENDING 저장</a:t>
             </a:r>
           </a:p>
           <a:p>
@@ -4589,18 +5658,120 @@
               <a:buChar char="•"/>
             </a:pPr>
             <a:r>
-              <a:rPr lang="ko-KR" sz="1900" dirty="0">
-                <a:solidFill>
-                  <a:srgbClr val="EAF6FF"/>
-                </a:solidFill>
-                <a:latin typeface="Malgun Gothic"/>
-                <a:ea typeface="Malgun Gothic"/>
-              </a:rPr>
-              <a:t>사용자는 익명성을 유지하면서 개인 작성 내역 확인</a:t>
-            </a:r>
-          </a:p>
-        </p:txBody>
-      </p:sp>
+              <a:rPr lang="ko-KR" sz="1700" dirty="0">
+                <a:solidFill>
+                  <a:srgbClr val="17324D"/>
+                </a:solidFill>
+                <a:latin typeface="Malgun Gothic"/>
+                <a:ea typeface="Malgun Gothic"/>
+              </a:rPr>
+              <a:t>검열은 백그라운드 처리</a:t>
+            </a:r>
+          </a:p>
+          <a:p>
+            <a:pPr marL="228600" indent="-171450" algn="l">
+              <a:buChar char="•"/>
+            </a:pPr>
+            <a:r>
+              <a:rPr lang="ko-KR" sz="1700" dirty="0">
+                <a:solidFill>
+                  <a:srgbClr val="17324D"/>
+                </a:solidFill>
+                <a:latin typeface="Malgun Gothic"/>
+                <a:ea typeface="Malgun Gothic"/>
+              </a:rPr>
+              <a:t>서버 재시작 시 PENDING 재처리</a:t>
+            </a:r>
+          </a:p>
+        </p:txBody>
+      </p:sp>
+      <p:pic>
+        <p:nvPicPr>
+          <p:cNvPr id="6" name="Picture 6"/>
+          <p:cNvPicPr>
+            <a:picLocks noChangeAspect="1"/>
+          </p:cNvPicPr>
+          <p:nvPr/>
+        </p:nvPicPr>
+        <p:blipFill>
+          <a:blip r:embed="rId2"/>
+          <a:stretch>
+            <a:fillRect/>
+          </a:stretch>
+        </p:blipFill>
+        <p:spPr>
+          <a:xfrm>
+            <a:off x="4114800" y="914400"/>
+            <a:ext cx="3931920" cy="4892040"/>
+          </a:xfrm>
+          <a:prstGeom prst="rect">
+            <a:avLst/>
+          </a:prstGeom>
+          <a:ln w="12700">
+            <a:solidFill>
+              <a:srgbClr val="C7E6FF"/>
+            </a:solidFill>
+          </a:ln>
+        </p:spPr>
+      </p:pic>
+      <p:pic>
+        <p:nvPicPr>
+          <p:cNvPr id="7" name="Picture 7"/>
+          <p:cNvPicPr>
+            <a:picLocks noChangeAspect="1"/>
+          </p:cNvPicPr>
+          <p:nvPr/>
+        </p:nvPicPr>
+        <p:blipFill>
+          <a:blip r:embed="rId3"/>
+          <a:stretch>
+            <a:fillRect/>
+          </a:stretch>
+        </p:blipFill>
+        <p:spPr>
+          <a:xfrm>
+            <a:off x="8275320" y="914400"/>
+            <a:ext cx="3017520" cy="2240280"/>
+          </a:xfrm>
+          <a:prstGeom prst="rect">
+            <a:avLst/>
+          </a:prstGeom>
+          <a:ln w="12700">
+            <a:solidFill>
+              <a:srgbClr val="C7E6FF"/>
+            </a:solidFill>
+          </a:ln>
+        </p:spPr>
+      </p:pic>
+      <p:pic>
+        <p:nvPicPr>
+          <p:cNvPr id="8" name="Picture 8"/>
+          <p:cNvPicPr>
+            <a:picLocks noChangeAspect="1"/>
+          </p:cNvPicPr>
+          <p:nvPr/>
+        </p:nvPicPr>
+        <p:blipFill>
+          <a:blip r:embed="rId4"/>
+          <a:stretch>
+            <a:fillRect/>
+          </a:stretch>
+        </p:blipFill>
+        <p:spPr>
+          <a:xfrm>
+            <a:off x="8275320" y="3429000"/>
+            <a:ext cx="3017520" cy="2377440"/>
+          </a:xfrm>
+          <a:prstGeom prst="rect">
+            <a:avLst/>
+          </a:prstGeom>
+          <a:ln w="12700">
+            <a:solidFill>
+              <a:srgbClr val="C7E6FF"/>
+            </a:solidFill>
+          </a:ln>
+        </p:spPr>
+      </p:pic>
     </p:spTree>
   </p:cSld>
   <p:clrMapOvr>
